--- a/marketing/GetInSync_NextGen_Garland_Light.pptx
+++ b/marketing/GetInSync_NextGen_Garland_Light.pptx
@@ -4,6 +4,9 @@
   <p:sldMasterIdLst>
     <p:sldMasterId id="2147483648" r:id="rId1"/>
   </p:sldMasterIdLst>
+  <p:notesMasterIdLst>
+    <p:notesMasterId r:id="rId20"/>
+  </p:notesMasterIdLst>
   <p:sldIdLst>
     <p:sldId id="256" r:id="rId2"/>
     <p:sldId id="257" r:id="rId3"/>
@@ -24,10 +27,7 @@
     <p:sldId id="272" r:id="rId18"/>
     <p:sldId id="273" r:id="rId19"/>
   </p:sldIdLst>
-  <p:notesMasterIdLst>
-    <p:notesMasterId r:id="rId20"/>
-  </p:notesMasterIdLst>
-  <p:sldSz cx="9144000" cy="5143500"/>
+  <p:sldSz cx="9144000" cy="5143500" type="screen16x9"/>
   <p:notesSz cx="5143500" cy="9144000"/>
   <p:defaultTextStyle>
     <a:lvl1pPr marL="0" algn="l" defTabSz="914400" rtl="0" eaLnBrk="1" latinLnBrk="0" hangingPunct="1">
@@ -121,6 +121,11 @@
       </a:defRPr>
     </a:lvl9pPr>
   </p:defaultTextStyle>
+  <p:extLst>
+    <p:ext uri="{EFAFB233-063F-42B5-8137-9DF3F51BA10A}">
+      <p15:sldGuideLst xmlns:p15="http://schemas.microsoft.com/office/powerpoint/2012/main"/>
+    </p:ext>
+  </p:extLst>
 </p:presentation>
 </file>
 
@@ -146,234 +151,10 @@
           <a:chExt cx="0" cy="0"/>
         </a:xfrm>
       </p:grpSpPr>
-      <p:sp>
-        <p:nvSpPr>
-          <p:cNvPr id="2" name="Header Placeholder 1"/>
-          <p:cNvSpPr>
-            <a:spLocks noGrp="1"/>
-          </p:cNvSpPr>
-          <p:nvPr>
-            <p:ph type="hdr" sz="quarter"/>
-          </p:nvPr>
-        </p:nvSpPr>
-        <p:spPr>
-          <a:xfrm>
-            <a:off x="0" y="0"/>
-            <a:ext cx="2971800" cy="458788"/>
-          </a:xfrm>
-          <a:prstGeom prst="rect">
-            <a:avLst/>
-          </a:prstGeom>
-        </p:spPr>
-        <p:txBody>
-          <a:bodyPr vert="horz" lIns="91440" tIns="45720" rIns="91440" bIns="45720" rtlCol="0"/>
-          <a:lstStyle>
-            <a:lvl1pPr algn="l">
-              <a:defRPr sz="1200"/>
-            </a:lvl1pPr>
-          </a:lstStyle>
-          <a:p>
-            <a:endParaRPr lang="en-US"/>
-          </a:p>
-        </p:txBody>
-      </p:sp>
-      <p:sp>
-        <p:nvSpPr>
-          <p:cNvPr id="3" name="Date Placeholder 2"/>
-          <p:cNvSpPr>
-            <a:spLocks noGrp="1"/>
-          </p:cNvSpPr>
-          <p:nvPr>
-            <p:ph type="dt" idx="1"/>
-          </p:nvPr>
-        </p:nvSpPr>
-        <p:spPr>
-          <a:xfrm>
-            <a:off x="3884613" y="0"/>
-            <a:ext cx="2971800" cy="458788"/>
-          </a:xfrm>
-          <a:prstGeom prst="rect">
-            <a:avLst/>
-          </a:prstGeom>
-        </p:spPr>
-        <p:txBody>
-          <a:bodyPr vert="horz" lIns="91440" tIns="45720" rIns="91440" bIns="45720" rtlCol="0"/>
-          <a:lstStyle>
-            <a:lvl1pPr algn="r">
-              <a:defRPr sz="1200"/>
-            </a:lvl1pPr>
-          </a:lstStyle>
-          <a:p>
-            <a:fld id="{5282F153-3F37-0F45-9E97-73ACFA13230C}" type="datetimeFigureOut">
-              <a:rPr lang="en-US"/>
-              <a:t>7/23/19</a:t>
-            </a:fld>
-            <a:endParaRPr lang="en-US"/>
-          </a:p>
-        </p:txBody>
-      </p:sp>
-      <p:sp>
-        <p:nvSpPr>
-          <p:cNvPr id="4" name="Slide Image Placeholder 3"/>
-          <p:cNvSpPr>
-            <a:spLocks noGrp="1" noRot="1" noChangeAspect="1"/>
-          </p:cNvSpPr>
-          <p:nvPr>
-            <p:ph type="sldImg" idx="2"/>
-          </p:nvPr>
-        </p:nvSpPr>
-        <p:spPr>
-          <a:xfrm>
-            <a:off x="685800" y="1143000"/>
-            <a:ext cx="5486400" cy="3086100"/>
-          </a:xfrm>
-          <a:prstGeom prst="rect">
-            <a:avLst/>
-          </a:prstGeom>
-          <a:noFill/>
-          <a:ln w="12700">
-            <a:solidFill>
-              <a:prstClr val="black"/>
-            </a:solidFill>
-          </a:ln>
-        </p:spPr>
-        <p:txBody>
-          <a:bodyPr vert="horz" lIns="91440" tIns="45720" rIns="91440" bIns="45720" rtlCol="0" anchor="ctr"/>
-          <a:lstStyle/>
-          <a:p>
-            <a:endParaRPr lang="en-US"/>
-          </a:p>
-        </p:txBody>
-      </p:sp>
-      <p:sp>
-        <p:nvSpPr>
-          <p:cNvPr id="5" name="Notes Placeholder 4"/>
-          <p:cNvSpPr>
-            <a:spLocks noGrp="1"/>
-          </p:cNvSpPr>
-          <p:nvPr>
-            <p:ph type="body" sz="quarter" idx="3"/>
-          </p:nvPr>
-        </p:nvSpPr>
-        <p:spPr>
-          <a:xfrm>
-            <a:off x="685800" y="4400550"/>
-            <a:ext cx="5486400" cy="3600450"/>
-          </a:xfrm>
-          <a:prstGeom prst="rect">
-            <a:avLst/>
-          </a:prstGeom>
-        </p:spPr>
-        <p:txBody>
-          <a:bodyPr vert="horz" lIns="91440" tIns="45720" rIns="91440" bIns="45720" rtlCol="0"/>
-          <a:lstStyle/>
-          <a:p>
-            <a:pPr lvl="0"/>
-            <a:r>
-              <a:rPr lang="en-US"/>
-              <a:t>Click to edit Master text styles</a:t>
-            </a:r>
-          </a:p>
-          <a:p>
-            <a:pPr lvl="1"/>
-            <a:r>
-              <a:rPr lang="en-US"/>
-              <a:t>Second level</a:t>
-            </a:r>
-          </a:p>
-          <a:p>
-            <a:pPr lvl="2"/>
-            <a:r>
-              <a:rPr lang="en-US"/>
-              <a:t>Third level</a:t>
-            </a:r>
-          </a:p>
-          <a:p>
-            <a:pPr lvl="3"/>
-            <a:r>
-              <a:rPr lang="en-US"/>
-              <a:t>Fourth level</a:t>
-            </a:r>
-          </a:p>
-          <a:p>
-            <a:pPr lvl="4"/>
-            <a:r>
-              <a:rPr lang="en-US"/>
-              <a:t>Fifth level</a:t>
-            </a:r>
-          </a:p>
-        </p:txBody>
-      </p:sp>
-      <p:sp>
-        <p:nvSpPr>
-          <p:cNvPr id="6" name="Footer Placeholder 5"/>
-          <p:cNvSpPr>
-            <a:spLocks noGrp="1"/>
-          </p:cNvSpPr>
-          <p:nvPr>
-            <p:ph type="ftr" sz="quarter" idx="4"/>
-          </p:nvPr>
-        </p:nvSpPr>
-        <p:spPr>
-          <a:xfrm>
-            <a:off x="0" y="8685213"/>
-            <a:ext cx="2971800" cy="458787"/>
-          </a:xfrm>
-          <a:prstGeom prst="rect">
-            <a:avLst/>
-          </a:prstGeom>
-        </p:spPr>
-        <p:txBody>
-          <a:bodyPr vert="horz" lIns="91440" tIns="45720" rIns="91440" bIns="45720" rtlCol="0" anchor="b"/>
-          <a:lstStyle>
-            <a:lvl1pPr algn="l">
-              <a:defRPr sz="1200"/>
-            </a:lvl1pPr>
-          </a:lstStyle>
-          <a:p>
-            <a:endParaRPr lang="en-US"/>
-          </a:p>
-        </p:txBody>
-      </p:sp>
-      <p:sp>
-        <p:nvSpPr>
-          <p:cNvPr id="7" name="Slide Number Placeholder 6"/>
-          <p:cNvSpPr>
-            <a:spLocks noGrp="1"/>
-          </p:cNvSpPr>
-          <p:nvPr>
-            <p:ph type="sldNum" sz="quarter" idx="5"/>
-          </p:nvPr>
-        </p:nvSpPr>
-        <p:spPr>
-          <a:xfrm>
-            <a:off x="3884613" y="8685213"/>
-            <a:ext cx="2971800" cy="458787"/>
-          </a:xfrm>
-          <a:prstGeom prst="rect">
-            <a:avLst/>
-          </a:prstGeom>
-        </p:spPr>
-        <p:txBody>
-          <a:bodyPr vert="horz" lIns="91440" tIns="45720" rIns="91440" bIns="45720" rtlCol="0" anchor="b"/>
-          <a:lstStyle>
-            <a:lvl1pPr algn="r">
-              <a:defRPr sz="1200"/>
-            </a:lvl1pPr>
-          </a:lstStyle>
-          <a:p>
-            <a:fld id="{CE5E9CC1-C706-0F49-92D6-E571CC5EEA8F}" type="slidenum">
-              <a:rPr lang="en-US"/>
-              <a:t>‹#›</a:t>
-            </a:fld>
-            <a:endParaRPr lang="en-US"/>
-          </a:p>
-        </p:txBody>
-      </p:sp>
     </p:spTree>
     <p:extLst>
       <p:ext uri="{BB962C8B-B14F-4D97-AF65-F5344CB8AC3E}">
-        <p14:creationId xmlns:p14="http://schemas.microsoft.com/office/powerpoint/2010/main" val="1024086991"/>
+        <p14:creationId xmlns:p14="http://schemas.microsoft.com/office/powerpoint/2010/main" val="440573608"/>
       </p:ext>
     </p:extLst>
   </p:cSld>
@@ -517,10 +298,6 @@
           <a:bodyPr/>
           <a:lstStyle/>
           <a:p>
-            <a:r>
-              <a:rPr lang="en-US" dirty="0"/>
-              <a:t/>
-            </a:r>
             <a:endParaRPr lang="en-US" dirty="0"/>
           </a:p>
         </p:txBody>
@@ -605,10 +382,6 @@
           <a:bodyPr/>
           <a:lstStyle/>
           <a:p>
-            <a:r>
-              <a:rPr lang="en-US" dirty="0"/>
-              <a:t/>
-            </a:r>
             <a:endParaRPr lang="en-US" dirty="0"/>
           </a:p>
         </p:txBody>
@@ -693,10 +466,6 @@
           <a:bodyPr/>
           <a:lstStyle/>
           <a:p>
-            <a:r>
-              <a:rPr lang="en-US" dirty="0"/>
-              <a:t/>
-            </a:r>
             <a:endParaRPr lang="en-US" dirty="0"/>
           </a:p>
         </p:txBody>
@@ -781,10 +550,6 @@
           <a:bodyPr/>
           <a:lstStyle/>
           <a:p>
-            <a:r>
-              <a:rPr lang="en-US" dirty="0"/>
-              <a:t/>
-            </a:r>
             <a:endParaRPr lang="en-US" dirty="0"/>
           </a:p>
         </p:txBody>
@@ -869,10 +634,6 @@
           <a:bodyPr/>
           <a:lstStyle/>
           <a:p>
-            <a:r>
-              <a:rPr lang="en-US" dirty="0"/>
-              <a:t/>
-            </a:r>
             <a:endParaRPr lang="en-US" dirty="0"/>
           </a:p>
         </p:txBody>
@@ -957,10 +718,6 @@
           <a:bodyPr/>
           <a:lstStyle/>
           <a:p>
-            <a:r>
-              <a:rPr lang="en-US" dirty="0"/>
-              <a:t/>
-            </a:r>
             <a:endParaRPr lang="en-US" dirty="0"/>
           </a:p>
         </p:txBody>
@@ -1045,10 +802,6 @@
           <a:bodyPr/>
           <a:lstStyle/>
           <a:p>
-            <a:r>
-              <a:rPr lang="en-US" dirty="0"/>
-              <a:t/>
-            </a:r>
             <a:endParaRPr lang="en-US" dirty="0"/>
           </a:p>
         </p:txBody>
@@ -1133,10 +886,6 @@
           <a:bodyPr/>
           <a:lstStyle/>
           <a:p>
-            <a:r>
-              <a:rPr lang="en-US" dirty="0"/>
-              <a:t/>
-            </a:r>
             <a:endParaRPr lang="en-US" dirty="0"/>
           </a:p>
         </p:txBody>
@@ -1221,10 +970,6 @@
           <a:bodyPr/>
           <a:lstStyle/>
           <a:p>
-            <a:r>
-              <a:rPr lang="en-US" dirty="0"/>
-              <a:t/>
-            </a:r>
             <a:endParaRPr lang="en-US" dirty="0"/>
           </a:p>
         </p:txBody>
@@ -1309,10 +1054,6 @@
           <a:bodyPr/>
           <a:lstStyle/>
           <a:p>
-            <a:r>
-              <a:rPr lang="en-US" dirty="0"/>
-              <a:t/>
-            </a:r>
             <a:endParaRPr lang="en-US" dirty="0"/>
           </a:p>
         </p:txBody>
@@ -1397,10 +1138,6 @@
           <a:bodyPr/>
           <a:lstStyle/>
           <a:p>
-            <a:r>
-              <a:rPr lang="en-US" dirty="0"/>
-              <a:t/>
-            </a:r>
             <a:endParaRPr lang="en-US" dirty="0"/>
           </a:p>
         </p:txBody>
@@ -1485,10 +1222,6 @@
           <a:bodyPr/>
           <a:lstStyle/>
           <a:p>
-            <a:r>
-              <a:rPr lang="en-US" dirty="0"/>
-              <a:t/>
-            </a:r>
             <a:endParaRPr lang="en-US" dirty="0"/>
           </a:p>
         </p:txBody>
@@ -1573,10 +1306,6 @@
           <a:bodyPr/>
           <a:lstStyle/>
           <a:p>
-            <a:r>
-              <a:rPr lang="en-US" dirty="0"/>
-              <a:t/>
-            </a:r>
             <a:endParaRPr lang="en-US" dirty="0"/>
           </a:p>
         </p:txBody>
@@ -1661,10 +1390,6 @@
           <a:bodyPr/>
           <a:lstStyle/>
           <a:p>
-            <a:r>
-              <a:rPr lang="en-US" dirty="0"/>
-              <a:t/>
-            </a:r>
             <a:endParaRPr lang="en-US" dirty="0"/>
           </a:p>
         </p:txBody>
@@ -1749,10 +1474,6 @@
           <a:bodyPr/>
           <a:lstStyle/>
           <a:p>
-            <a:r>
-              <a:rPr lang="en-US" dirty="0"/>
-              <a:t/>
-            </a:r>
             <a:endParaRPr lang="en-US" dirty="0"/>
           </a:p>
         </p:txBody>
@@ -1837,10 +1558,6 @@
           <a:bodyPr/>
           <a:lstStyle/>
           <a:p>
-            <a:r>
-              <a:rPr lang="en-US" dirty="0"/>
-              <a:t/>
-            </a:r>
             <a:endParaRPr lang="en-US" dirty="0"/>
           </a:p>
         </p:txBody>
@@ -1925,10 +1642,6 @@
           <a:bodyPr/>
           <a:lstStyle/>
           <a:p>
-            <a:r>
-              <a:rPr lang="en-US" dirty="0"/>
-              <a:t/>
-            </a:r>
             <a:endParaRPr lang="en-US" dirty="0"/>
           </a:p>
         </p:txBody>
@@ -2013,10 +1726,6 @@
           <a:bodyPr/>
           <a:lstStyle/>
           <a:p>
-            <a:r>
-              <a:rPr lang="en-US" dirty="0"/>
-              <a:t/>
-            </a:r>
             <a:endParaRPr lang="en-US" dirty="0"/>
           </a:p>
         </p:txBody>
@@ -2090,6 +1799,11 @@
 <file path=ppt/slideMasters/slideMaster1.xml><?xml version="1.0" encoding="utf-8"?>
 <p:sldMaster xmlns:a="http://schemas.openxmlformats.org/drawingml/2006/main" xmlns:r="http://schemas.openxmlformats.org/officeDocument/2006/relationships" xmlns:p="http://schemas.openxmlformats.org/presentationml/2006/main">
   <p:cSld>
+    <p:bg>
+      <p:bgRef idx="1001">
+        <a:schemeClr val="bg1"/>
+      </p:bgRef>
+    </p:bg>
     <p:spTree>
       <p:nvGrpSpPr>
         <p:cNvPr id="1" name=""/>
@@ -2372,6 +2086,7 @@
         <a:solidFill>
           <a:srgbClr val="1A2744"/>
         </a:solidFill>
+        <a:effectLst/>
       </p:bgPr>
     </p:bg>
     <p:spTree>
@@ -2409,7 +2124,7 @@
           <a:bodyPr wrap="square" lIns="0" tIns="0" rIns="0" bIns="0" rtlCol="0" anchor="ctr"/>
           <a:lstStyle/>
           <a:p>
-            <a:pPr indent="0" marL="0">
+            <a:pPr marL="0" indent="0">
               <a:buNone/>
             </a:pPr>
             <a:r>
@@ -2448,7 +2163,7 @@
           <a:bodyPr wrap="square" lIns="0" tIns="0" rIns="0" bIns="0" rtlCol="0" anchor="ctr"/>
           <a:lstStyle/>
           <a:p>
-            <a:pPr indent="0" marL="0">
+            <a:pPr marL="0" indent="0">
               <a:buNone/>
             </a:pPr>
             <a:r>
@@ -2487,7 +2202,7 @@
           <a:bodyPr wrap="square" lIns="0" tIns="0" rIns="0" bIns="0" rtlCol="0" anchor="ctr"/>
           <a:lstStyle/>
           <a:p>
-            <a:pPr indent="0" marL="0">
+            <a:pPr marL="0" indent="0">
               <a:buNone/>
             </a:pPr>
             <a:r>
@@ -2526,7 +2241,7 @@
           <a:bodyPr wrap="square" lIns="0" tIns="0" rIns="0" bIns="0" rtlCol="0" anchor="ctr"/>
           <a:lstStyle/>
           <a:p>
-            <a:pPr indent="0" marL="0">
+            <a:pPr marL="0" indent="0">
               <a:buNone/>
             </a:pPr>
             <a:r>
@@ -2560,6 +2275,7 @@
         <a:solidFill>
           <a:srgbClr val="F7F8FA"/>
         </a:solidFill>
+        <a:effectLst/>
       </p:bgPr>
     </p:bg>
     <p:spTree>
@@ -2597,7 +2313,7 @@
           <a:bodyPr wrap="square" lIns="0" tIns="0" rIns="0" bIns="0" rtlCol="0" anchor="ctr"/>
           <a:lstStyle/>
           <a:p>
-            <a:pPr indent="0" marL="0">
+            <a:pPr marL="0" indent="0">
               <a:buNone/>
             </a:pPr>
             <a:r>
@@ -2634,6 +2350,13 @@
           </a:solidFill>
           <a:ln/>
         </p:spPr>
+        <p:txBody>
+          <a:bodyPr/>
+          <a:lstStyle/>
+          <a:p>
+            <a:endParaRPr lang="en-US"/>
+          </a:p>
+        </p:txBody>
       </p:sp>
       <p:sp>
         <p:nvSpPr>
@@ -2656,7 +2379,7 @@
           <a:bodyPr wrap="square" lIns="0" tIns="0" rIns="0" bIns="0" rtlCol="0" anchor="ctr"/>
           <a:lstStyle/>
           <a:p>
-            <a:pPr indent="0" marL="0">
+            <a:pPr marL="0" indent="0">
               <a:buNone/>
             </a:pPr>
             <a:r>
@@ -2693,6 +2416,13 @@
           </a:solidFill>
           <a:ln/>
         </p:spPr>
+        <p:txBody>
+          <a:bodyPr/>
+          <a:lstStyle/>
+          <a:p>
+            <a:endParaRPr lang="en-US"/>
+          </a:p>
+        </p:txBody>
       </p:sp>
       <p:sp>
         <p:nvSpPr>
@@ -2715,7 +2445,7 @@
           <a:bodyPr wrap="square" lIns="0" tIns="0" rIns="0" bIns="0" rtlCol="0" anchor="ctr"/>
           <a:lstStyle/>
           <a:p>
-            <a:pPr indent="0" marL="0">
+            <a:pPr marL="0" indent="0">
               <a:buNone/>
             </a:pPr>
             <a:r>
@@ -2757,6 +2487,13 @@
             <a:prstDash val="solid"/>
           </a:ln>
         </p:spPr>
+        <p:txBody>
+          <a:bodyPr/>
+          <a:lstStyle/>
+          <a:p>
+            <a:endParaRPr lang="en-US"/>
+          </a:p>
+        </p:txBody>
       </p:sp>
       <p:sp>
         <p:nvSpPr>
@@ -2779,7 +2516,7 @@
           <a:bodyPr wrap="square" lIns="0" tIns="0" rIns="0" bIns="0" rtlCol="0" anchor="ctr"/>
           <a:lstStyle/>
           <a:p>
-            <a:pPr indent="0" marL="0">
+            <a:pPr marL="0" indent="0">
               <a:buNone/>
             </a:pPr>
             <a:r>
@@ -2821,6 +2558,13 @@
             <a:prstDash val="solid"/>
           </a:ln>
         </p:spPr>
+        <p:txBody>
+          <a:bodyPr/>
+          <a:lstStyle/>
+          <a:p>
+            <a:endParaRPr lang="en-US"/>
+          </a:p>
+        </p:txBody>
       </p:sp>
       <p:sp>
         <p:nvSpPr>
@@ -2843,7 +2587,7 @@
           <a:bodyPr wrap="square" lIns="0" tIns="0" rIns="0" bIns="0" rtlCol="0" anchor="ctr"/>
           <a:lstStyle/>
           <a:p>
-            <a:pPr indent="0" marL="0">
+            <a:pPr marL="0" indent="0">
               <a:buNone/>
             </a:pPr>
             <a:r>
@@ -2885,6 +2629,13 @@
             <a:prstDash val="solid"/>
           </a:ln>
         </p:spPr>
+        <p:txBody>
+          <a:bodyPr/>
+          <a:lstStyle/>
+          <a:p>
+            <a:endParaRPr lang="en-US"/>
+          </a:p>
+        </p:txBody>
       </p:sp>
       <p:sp>
         <p:nvSpPr>
@@ -2907,7 +2658,7 @@
           <a:bodyPr wrap="square" lIns="0" tIns="0" rIns="0" bIns="0" rtlCol="0" anchor="ctr"/>
           <a:lstStyle/>
           <a:p>
-            <a:pPr indent="0" marL="0">
+            <a:pPr marL="0" indent="0">
               <a:buNone/>
             </a:pPr>
             <a:r>
@@ -2949,6 +2700,13 @@
             <a:prstDash val="solid"/>
           </a:ln>
         </p:spPr>
+        <p:txBody>
+          <a:bodyPr/>
+          <a:lstStyle/>
+          <a:p>
+            <a:endParaRPr lang="en-US"/>
+          </a:p>
+        </p:txBody>
       </p:sp>
       <p:sp>
         <p:nvSpPr>
@@ -2971,7 +2729,7 @@
           <a:bodyPr wrap="square" lIns="0" tIns="0" rIns="0" bIns="0" rtlCol="0" anchor="ctr"/>
           <a:lstStyle/>
           <a:p>
-            <a:pPr indent="0" marL="0">
+            <a:pPr marL="0" indent="0">
               <a:buNone/>
             </a:pPr>
             <a:r>
@@ -3013,6 +2771,13 @@
             <a:prstDash val="solid"/>
           </a:ln>
         </p:spPr>
+        <p:txBody>
+          <a:bodyPr/>
+          <a:lstStyle/>
+          <a:p>
+            <a:endParaRPr lang="en-US"/>
+          </a:p>
+        </p:txBody>
       </p:sp>
       <p:sp>
         <p:nvSpPr>
@@ -3035,7 +2800,7 @@
           <a:bodyPr wrap="square" lIns="0" tIns="0" rIns="0" bIns="0" rtlCol="0" anchor="ctr"/>
           <a:lstStyle/>
           <a:p>
-            <a:pPr indent="0" marL="0">
+            <a:pPr marL="0" indent="0">
               <a:buNone/>
             </a:pPr>
             <a:r>
@@ -3077,6 +2842,13 @@
             <a:prstDash val="solid"/>
           </a:ln>
         </p:spPr>
+        <p:txBody>
+          <a:bodyPr/>
+          <a:lstStyle/>
+          <a:p>
+            <a:endParaRPr lang="en-US"/>
+          </a:p>
+        </p:txBody>
       </p:sp>
       <p:sp>
         <p:nvSpPr>
@@ -3099,7 +2871,7 @@
           <a:bodyPr wrap="square" lIns="0" tIns="0" rIns="0" bIns="0" rtlCol="0" anchor="ctr"/>
           <a:lstStyle/>
           <a:p>
-            <a:pPr indent="0" marL="0">
+            <a:pPr marL="0" indent="0">
               <a:buNone/>
             </a:pPr>
             <a:r>
@@ -3141,6 +2913,13 @@
             <a:prstDash val="solid"/>
           </a:ln>
         </p:spPr>
+        <p:txBody>
+          <a:bodyPr/>
+          <a:lstStyle/>
+          <a:p>
+            <a:endParaRPr lang="en-US"/>
+          </a:p>
+        </p:txBody>
       </p:sp>
       <p:sp>
         <p:nvSpPr>
@@ -3163,7 +2942,7 @@
           <a:bodyPr wrap="square" lIns="0" tIns="0" rIns="0" bIns="0" rtlCol="0" anchor="ctr"/>
           <a:lstStyle/>
           <a:p>
-            <a:pPr indent="0" marL="0">
+            <a:pPr marL="0" indent="0">
               <a:buNone/>
             </a:pPr>
             <a:r>
@@ -3205,6 +2984,13 @@
             <a:prstDash val="solid"/>
           </a:ln>
         </p:spPr>
+        <p:txBody>
+          <a:bodyPr/>
+          <a:lstStyle/>
+          <a:p>
+            <a:endParaRPr lang="en-US"/>
+          </a:p>
+        </p:txBody>
       </p:sp>
       <p:sp>
         <p:nvSpPr>
@@ -3227,7 +3013,7 @@
           <a:bodyPr wrap="square" lIns="0" tIns="0" rIns="0" bIns="0" rtlCol="0" anchor="ctr"/>
           <a:lstStyle/>
           <a:p>
-            <a:pPr indent="0" marL="0">
+            <a:pPr marL="0" indent="0">
               <a:buNone/>
             </a:pPr>
             <a:r>
@@ -3269,6 +3055,13 @@
             <a:prstDash val="solid"/>
           </a:ln>
         </p:spPr>
+        <p:txBody>
+          <a:bodyPr/>
+          <a:lstStyle/>
+          <a:p>
+            <a:endParaRPr lang="en-US"/>
+          </a:p>
+        </p:txBody>
       </p:sp>
       <p:sp>
         <p:nvSpPr>
@@ -3291,7 +3084,7 @@
           <a:bodyPr wrap="square" lIns="0" tIns="0" rIns="0" bIns="0" rtlCol="0" anchor="ctr"/>
           <a:lstStyle/>
           <a:p>
-            <a:pPr indent="0" marL="0">
+            <a:pPr marL="0" indent="0">
               <a:buNone/>
             </a:pPr>
             <a:r>
@@ -3333,6 +3126,13 @@
             <a:prstDash val="solid"/>
           </a:ln>
         </p:spPr>
+        <p:txBody>
+          <a:bodyPr/>
+          <a:lstStyle/>
+          <a:p>
+            <a:endParaRPr lang="en-US"/>
+          </a:p>
+        </p:txBody>
       </p:sp>
       <p:sp>
         <p:nvSpPr>
@@ -3355,7 +3155,7 @@
           <a:bodyPr wrap="square" lIns="0" tIns="0" rIns="0" bIns="0" rtlCol="0" anchor="ctr"/>
           <a:lstStyle/>
           <a:p>
-            <a:pPr indent="0" marL="0">
+            <a:pPr marL="0" indent="0">
               <a:buNone/>
             </a:pPr>
             <a:r>
@@ -3397,6 +3197,13 @@
             <a:prstDash val="solid"/>
           </a:ln>
         </p:spPr>
+        <p:txBody>
+          <a:bodyPr/>
+          <a:lstStyle/>
+          <a:p>
+            <a:endParaRPr lang="en-US"/>
+          </a:p>
+        </p:txBody>
       </p:sp>
       <p:sp>
         <p:nvSpPr>
@@ -3419,7 +3226,7 @@
           <a:bodyPr wrap="square" lIns="0" tIns="0" rIns="0" bIns="0" rtlCol="0" anchor="ctr"/>
           <a:lstStyle/>
           <a:p>
-            <a:pPr indent="0" marL="0">
+            <a:pPr marL="0" indent="0">
               <a:buNone/>
             </a:pPr>
             <a:r>
@@ -3461,6 +3268,13 @@
             <a:prstDash val="solid"/>
           </a:ln>
         </p:spPr>
+        <p:txBody>
+          <a:bodyPr/>
+          <a:lstStyle/>
+          <a:p>
+            <a:endParaRPr lang="en-US"/>
+          </a:p>
+        </p:txBody>
       </p:sp>
       <p:sp>
         <p:nvSpPr>
@@ -3483,7 +3297,7 @@
           <a:bodyPr wrap="square" lIns="0" tIns="0" rIns="0" bIns="0" rtlCol="0" anchor="ctr"/>
           <a:lstStyle/>
           <a:p>
-            <a:pPr indent="0" marL="0">
+            <a:pPr marL="0" indent="0">
               <a:buNone/>
             </a:pPr>
             <a:r>
@@ -3525,6 +3339,13 @@
             <a:prstDash val="solid"/>
           </a:ln>
         </p:spPr>
+        <p:txBody>
+          <a:bodyPr/>
+          <a:lstStyle/>
+          <a:p>
+            <a:endParaRPr lang="en-US"/>
+          </a:p>
+        </p:txBody>
       </p:sp>
       <p:sp>
         <p:nvSpPr>
@@ -3547,7 +3368,7 @@
           <a:bodyPr wrap="square" lIns="0" tIns="0" rIns="0" bIns="0" rtlCol="0" anchor="ctr"/>
           <a:lstStyle/>
           <a:p>
-            <a:pPr indent="0" marL="0">
+            <a:pPr marL="0" indent="0">
               <a:buNone/>
             </a:pPr>
             <a:r>
@@ -3589,6 +3410,13 @@
             <a:prstDash val="solid"/>
           </a:ln>
         </p:spPr>
+        <p:txBody>
+          <a:bodyPr/>
+          <a:lstStyle/>
+          <a:p>
+            <a:endParaRPr lang="en-US"/>
+          </a:p>
+        </p:txBody>
       </p:sp>
       <p:sp>
         <p:nvSpPr>
@@ -3611,7 +3439,7 @@
           <a:bodyPr wrap="square" lIns="0" tIns="0" rIns="0" bIns="0" rtlCol="0" anchor="ctr"/>
           <a:lstStyle/>
           <a:p>
-            <a:pPr indent="0" marL="0">
+            <a:pPr marL="0" indent="0">
               <a:buNone/>
             </a:pPr>
             <a:r>
@@ -3653,6 +3481,13 @@
             <a:prstDash val="solid"/>
           </a:ln>
         </p:spPr>
+        <p:txBody>
+          <a:bodyPr/>
+          <a:lstStyle/>
+          <a:p>
+            <a:endParaRPr lang="en-US"/>
+          </a:p>
+        </p:txBody>
       </p:sp>
       <p:sp>
         <p:nvSpPr>
@@ -3675,7 +3510,7 @@
           <a:bodyPr wrap="square" lIns="0" tIns="0" rIns="0" bIns="0" rtlCol="0" anchor="ctr"/>
           <a:lstStyle/>
           <a:p>
-            <a:pPr indent="0" marL="0">
+            <a:pPr marL="0" indent="0">
               <a:buNone/>
             </a:pPr>
             <a:r>
@@ -3717,6 +3552,13 @@
             <a:prstDash val="solid"/>
           </a:ln>
         </p:spPr>
+        <p:txBody>
+          <a:bodyPr/>
+          <a:lstStyle/>
+          <a:p>
+            <a:endParaRPr lang="en-US"/>
+          </a:p>
+        </p:txBody>
       </p:sp>
       <p:sp>
         <p:nvSpPr>
@@ -3739,7 +3581,7 @@
           <a:bodyPr wrap="square" lIns="0" tIns="0" rIns="0" bIns="0" rtlCol="0" anchor="ctr"/>
           <a:lstStyle/>
           <a:p>
-            <a:pPr indent="0" marL="0">
+            <a:pPr marL="0" indent="0">
               <a:buNone/>
             </a:pPr>
             <a:r>
@@ -3778,11 +3620,11 @@
           <a:bodyPr wrap="square" lIns="0" tIns="0" rIns="0" bIns="0" rtlCol="0" anchor="ctr"/>
           <a:lstStyle/>
           <a:p>
-            <a:pPr indent="0" marL="0">
-              <a:buNone/>
-            </a:pPr>
-            <a:r>
-              <a:rPr lang="en-US" sz="800" i="1" dirty="0">
+            <a:pPr marL="0" indent="0">
+              <a:buNone/>
+            </a:pPr>
+            <a:r>
+              <a:rPr lang="en-US" sz="1000" i="1" dirty="0">
                 <a:solidFill>
                   <a:srgbClr val="028090"/>
                 </a:solidFill>
@@ -3792,7 +3634,7 @@
               </a:rPr>
               <a:t>We'll walk through an assessment live — 24 questions, two actionable quadrants.</a:t>
             </a:r>
-            <a:endParaRPr lang="en-US" sz="800" dirty="0"/>
+            <a:endParaRPr lang="en-US" sz="1000" dirty="0"/>
           </a:p>
         </p:txBody>
       </p:sp>
@@ -3817,7 +3659,7 @@
           <a:bodyPr wrap="square" lIns="0" tIns="0" rIns="0" bIns="0" rtlCol="0" anchor="ctr"/>
           <a:lstStyle/>
           <a:p>
-            <a:pPr algn="r" indent="0" marL="0">
+            <a:pPr marL="0" indent="0" algn="r">
               <a:buNone/>
             </a:pPr>
             <a:r>
@@ -3851,6 +3693,7 @@
         <a:solidFill>
           <a:srgbClr val="F7F8FA"/>
         </a:solidFill>
+        <a:effectLst/>
       </p:bgPr>
     </p:bg>
     <p:spTree>
@@ -3888,7 +3731,7 @@
           <a:bodyPr wrap="square" lIns="0" tIns="0" rIns="0" bIns="0" rtlCol="0" anchor="ctr"/>
           <a:lstStyle/>
           <a:p>
-            <a:pPr indent="0" marL="0">
+            <a:pPr marL="0" indent="0">
               <a:buNone/>
             </a:pPr>
             <a:r>
@@ -3927,7 +3770,7 @@
           <a:bodyPr wrap="square" lIns="0" tIns="0" rIns="0" bIns="0" rtlCol="0" anchor="ctr"/>
           <a:lstStyle/>
           <a:p>
-            <a:pPr indent="0" marL="0">
+            <a:pPr marL="0" indent="0">
               <a:buNone/>
             </a:pPr>
             <a:r>
@@ -3953,7 +3796,7 @@
         </p:nvSpPr>
         <p:spPr>
           <a:xfrm>
-            <a:off x="548640" y="1280160"/>
+            <a:off x="548640" y="1161288"/>
             <a:ext cx="8046720" cy="228600"/>
           </a:xfrm>
           <a:prstGeom prst="rect">
@@ -3966,9 +3809,6 @@
           <a:bodyPr wrap="square" lIns="0" tIns="0" rIns="0" bIns="0" rtlCol="0" anchor="ctr"/>
           <a:lstStyle/>
           <a:p>
-            <a:pPr indent="0" marL="0">
-              <a:buNone/>
-            </a:pPr>
             <a:r>
               <a:rPr lang="en-US" sz="1100" b="1" dirty="0">
                 <a:solidFill>
@@ -3978,7 +3818,7 @@
                 <a:ea typeface="Calibri" pitchFamily="34" charset="-122"/>
                 <a:cs typeface="Calibri" pitchFamily="34" charset="-120"/>
               </a:rPr>
-              <a:t>How much are we spending with Oracle across all departments?</a:t>
+              <a:t>How much are we spending on databases across all departments?</a:t>
             </a:r>
             <a:endParaRPr lang="en-US" sz="1100" dirty="0"/>
           </a:p>
@@ -3992,7 +3832,7 @@
         </p:nvSpPr>
         <p:spPr>
           <a:xfrm>
-            <a:off x="548640" y="1536192"/>
+            <a:off x="548640" y="1417320"/>
             <a:ext cx="8046720" cy="274320"/>
           </a:xfrm>
           <a:prstGeom prst="rect">
@@ -4005,7 +3845,7 @@
           <a:bodyPr wrap="square" lIns="0" tIns="0" rIns="0" bIns="0" rtlCol="0" anchor="ctr"/>
           <a:lstStyle/>
           <a:p>
-            <a:pPr indent="0" marL="0">
+            <a:pPr marL="0" indent="0">
               <a:buNone/>
             </a:pPr>
             <a:r>
@@ -4031,7 +3871,7 @@
         </p:nvSpPr>
         <p:spPr>
           <a:xfrm>
-            <a:off x="548640" y="1920240"/>
+            <a:off x="548640" y="1801368"/>
             <a:ext cx="8046720" cy="228600"/>
           </a:xfrm>
           <a:prstGeom prst="rect">
@@ -4044,7 +3884,7 @@
           <a:bodyPr wrap="square" lIns="0" tIns="0" rIns="0" bIns="0" rtlCol="0" anchor="ctr"/>
           <a:lstStyle/>
           <a:p>
-            <a:pPr indent="0" marL="0">
+            <a:pPr marL="0" indent="0">
               <a:buNone/>
             </a:pPr>
             <a:r>
@@ -4070,7 +3910,7 @@
         </p:nvSpPr>
         <p:spPr>
           <a:xfrm>
-            <a:off x="548640" y="2176272"/>
+            <a:off x="548640" y="2057400"/>
             <a:ext cx="8046720" cy="274320"/>
           </a:xfrm>
           <a:prstGeom prst="rect">
@@ -4083,7 +3923,7 @@
           <a:bodyPr wrap="square" lIns="0" tIns="0" rIns="0" bIns="0" rtlCol="0" anchor="ctr"/>
           <a:lstStyle/>
           <a:p>
-            <a:pPr indent="0" marL="0">
+            <a:pPr marL="0" indent="0">
               <a:buNone/>
             </a:pPr>
             <a:r>
@@ -4109,7 +3949,7 @@
         </p:nvSpPr>
         <p:spPr>
           <a:xfrm>
-            <a:off x="548640" y="2560320"/>
+            <a:off x="548640" y="2441448"/>
             <a:ext cx="8046720" cy="228600"/>
           </a:xfrm>
           <a:prstGeom prst="rect">
@@ -4122,7 +3962,7 @@
           <a:bodyPr wrap="square" lIns="0" tIns="0" rIns="0" bIns="0" rtlCol="0" anchor="ctr"/>
           <a:lstStyle/>
           <a:p>
-            <a:pPr indent="0" marL="0">
+            <a:pPr marL="0" indent="0">
               <a:buNone/>
             </a:pPr>
             <a:r>
@@ -4148,7 +3988,7 @@
         </p:nvSpPr>
         <p:spPr>
           <a:xfrm>
-            <a:off x="548640" y="2816352"/>
+            <a:off x="548640" y="2697480"/>
             <a:ext cx="8046720" cy="274320"/>
           </a:xfrm>
           <a:prstGeom prst="rect">
@@ -4161,7 +4001,7 @@
           <a:bodyPr wrap="square" lIns="0" tIns="0" rIns="0" bIns="0" rtlCol="0" anchor="ctr"/>
           <a:lstStyle/>
           <a:p>
-            <a:pPr indent="0" marL="0">
+            <a:pPr marL="0" indent="0">
               <a:buNone/>
             </a:pPr>
             <a:r>
@@ -4187,7 +4027,7 @@
         </p:nvSpPr>
         <p:spPr>
           <a:xfrm>
-            <a:off x="548640" y="3200400"/>
+            <a:off x="548640" y="3081528"/>
             <a:ext cx="8046720" cy="228600"/>
           </a:xfrm>
           <a:prstGeom prst="rect">
@@ -4200,7 +4040,7 @@
           <a:bodyPr wrap="square" lIns="0" tIns="0" rIns="0" bIns="0" rtlCol="0" anchor="ctr"/>
           <a:lstStyle/>
           <a:p>
-            <a:pPr indent="0" marL="0">
+            <a:pPr marL="0" indent="0">
               <a:buNone/>
             </a:pPr>
             <a:r>
@@ -4226,7 +4066,7 @@
         </p:nvSpPr>
         <p:spPr>
           <a:xfrm>
-            <a:off x="548640" y="3456432"/>
+            <a:off x="548640" y="3337560"/>
             <a:ext cx="8046720" cy="274320"/>
           </a:xfrm>
           <a:prstGeom prst="rect">
@@ -4239,7 +4079,7 @@
           <a:bodyPr wrap="square" lIns="0" tIns="0" rIns="0" bIns="0" rtlCol="0" anchor="ctr"/>
           <a:lstStyle/>
           <a:p>
-            <a:pPr indent="0" marL="0">
+            <a:pPr marL="0" indent="0">
               <a:buNone/>
             </a:pPr>
             <a:r>
@@ -4265,7 +4105,7 @@
         </p:nvSpPr>
         <p:spPr>
           <a:xfrm>
-            <a:off x="548640" y="3840480"/>
+            <a:off x="548640" y="3721608"/>
             <a:ext cx="8046720" cy="228600"/>
           </a:xfrm>
           <a:prstGeom prst="rect">
@@ -4278,7 +4118,7 @@
           <a:bodyPr wrap="square" lIns="0" tIns="0" rIns="0" bIns="0" rtlCol="0" anchor="ctr"/>
           <a:lstStyle/>
           <a:p>
-            <a:pPr indent="0" marL="0">
+            <a:pPr marL="0" indent="0">
               <a:buNone/>
             </a:pPr>
             <a:r>
@@ -4304,7 +4144,7 @@
         </p:nvSpPr>
         <p:spPr>
           <a:xfrm>
-            <a:off x="548640" y="4096512"/>
+            <a:off x="548640" y="3977640"/>
             <a:ext cx="8046720" cy="274320"/>
           </a:xfrm>
           <a:prstGeom prst="rect">
@@ -4317,7 +4157,7 @@
           <a:bodyPr wrap="square" lIns="0" tIns="0" rIns="0" bIns="0" rtlCol="0" anchor="ctr"/>
           <a:lstStyle/>
           <a:p>
-            <a:pPr indent="0" marL="0">
+            <a:pPr marL="0" indent="0">
               <a:buNone/>
             </a:pPr>
             <a:r>
@@ -4343,7 +4183,7 @@
         </p:nvSpPr>
         <p:spPr>
           <a:xfrm>
-            <a:off x="548640" y="4526280"/>
+            <a:off x="548640" y="4411980"/>
             <a:ext cx="8046720" cy="228600"/>
           </a:xfrm>
           <a:prstGeom prst="rect">
@@ -4356,7 +4196,7 @@
           <a:bodyPr wrap="square" lIns="0" tIns="0" rIns="0" bIns="0" rtlCol="0" anchor="ctr"/>
           <a:lstStyle/>
           <a:p>
-            <a:pPr indent="0" marL="0">
+            <a:pPr marL="0" indent="0">
               <a:buNone/>
             </a:pPr>
             <a:r>
@@ -4382,7 +4222,7 @@
         </p:nvSpPr>
         <p:spPr>
           <a:xfrm>
-            <a:off x="548640" y="4800600"/>
+            <a:off x="548640" y="4691743"/>
             <a:ext cx="7315200" cy="274320"/>
           </a:xfrm>
           <a:prstGeom prst="rect">
@@ -4395,11 +4235,11 @@
           <a:bodyPr wrap="square" lIns="0" tIns="0" rIns="0" bIns="0" rtlCol="0" anchor="ctr"/>
           <a:lstStyle/>
           <a:p>
-            <a:pPr indent="0" marL="0">
-              <a:buNone/>
-            </a:pPr>
-            <a:r>
-              <a:rPr lang="en-US" sz="800" i="1" dirty="0">
+            <a:pPr marL="0" indent="0">
+              <a:buNone/>
+            </a:pPr>
+            <a:r>
+              <a:rPr lang="en-US" sz="1000" i="1" dirty="0">
                 <a:solidFill>
                   <a:srgbClr val="028090"/>
                 </a:solidFill>
@@ -4407,9 +4247,9 @@
                 <a:ea typeface="Calibri" pitchFamily="34" charset="-122"/>
                 <a:cs typeface="Calibri" pitchFamily="34" charset="-120"/>
               </a:rPr>
-              <a:t>Try these queries live against your portfolio in the demo.</a:t>
-            </a:r>
-            <a:endParaRPr lang="en-US" sz="800" dirty="0"/>
+              <a:t>Try these queries live against your portfolio in the demo.  Run AI Evals as required.</a:t>
+            </a:r>
+            <a:endParaRPr lang="en-US" sz="1000" dirty="0"/>
           </a:p>
         </p:txBody>
       </p:sp>
@@ -4434,7 +4274,7 @@
           <a:bodyPr wrap="square" lIns="0" tIns="0" rIns="0" bIns="0" rtlCol="0" anchor="ctr"/>
           <a:lstStyle/>
           <a:p>
-            <a:pPr algn="r" indent="0" marL="0">
+            <a:pPr marL="0" indent="0" algn="r">
               <a:buNone/>
             </a:pPr>
             <a:r>
@@ -4468,6 +4308,7 @@
         <a:solidFill>
           <a:srgbClr val="F7F8FA"/>
         </a:solidFill>
+        <a:effectLst/>
       </p:bgPr>
     </p:bg>
     <p:spTree>
@@ -4505,7 +4346,7 @@
           <a:bodyPr wrap="square" lIns="0" tIns="0" rIns="0" bIns="0" rtlCol="0" anchor="ctr"/>
           <a:lstStyle/>
           <a:p>
-            <a:pPr indent="0" marL="0">
+            <a:pPr marL="0" indent="0">
               <a:buNone/>
             </a:pPr>
             <a:r>
@@ -4542,6 +4383,13 @@
           </a:solidFill>
           <a:ln/>
         </p:spPr>
+        <p:txBody>
+          <a:bodyPr/>
+          <a:lstStyle/>
+          <a:p>
+            <a:endParaRPr lang="en-US"/>
+          </a:p>
+        </p:txBody>
       </p:sp>
       <p:sp>
         <p:nvSpPr>
@@ -4564,7 +4412,7 @@
           <a:bodyPr wrap="square" lIns="0" tIns="0" rIns="0" bIns="0" rtlCol="0" anchor="ctr"/>
           <a:lstStyle/>
           <a:p>
-            <a:pPr indent="0" marL="0">
+            <a:pPr marL="0" indent="0">
               <a:buNone/>
             </a:pPr>
             <a:r>
@@ -4601,6 +4449,13 @@
           </a:solidFill>
           <a:ln/>
         </p:spPr>
+        <p:txBody>
+          <a:bodyPr/>
+          <a:lstStyle/>
+          <a:p>
+            <a:endParaRPr lang="en-US"/>
+          </a:p>
+        </p:txBody>
       </p:sp>
       <p:sp>
         <p:nvSpPr>
@@ -4623,7 +4478,7 @@
           <a:bodyPr wrap="square" lIns="0" tIns="0" rIns="0" bIns="0" rtlCol="0" anchor="ctr"/>
           <a:lstStyle/>
           <a:p>
-            <a:pPr indent="0" marL="0">
+            <a:pPr marL="0" indent="0">
               <a:buNone/>
             </a:pPr>
             <a:r>
@@ -4665,6 +4520,13 @@
             <a:prstDash val="solid"/>
           </a:ln>
         </p:spPr>
+        <p:txBody>
+          <a:bodyPr/>
+          <a:lstStyle/>
+          <a:p>
+            <a:endParaRPr lang="en-US"/>
+          </a:p>
+        </p:txBody>
       </p:sp>
       <p:sp>
         <p:nvSpPr>
@@ -4687,7 +4549,7 @@
           <a:bodyPr wrap="square" lIns="0" tIns="0" rIns="0" bIns="0" rtlCol="0" anchor="ctr"/>
           <a:lstStyle/>
           <a:p>
-            <a:pPr indent="0" marL="0">
+            <a:pPr marL="0" indent="0">
               <a:buNone/>
             </a:pPr>
             <a:r>
@@ -4729,6 +4591,13 @@
             <a:prstDash val="solid"/>
           </a:ln>
         </p:spPr>
+        <p:txBody>
+          <a:bodyPr/>
+          <a:lstStyle/>
+          <a:p>
+            <a:endParaRPr lang="en-US"/>
+          </a:p>
+        </p:txBody>
       </p:sp>
       <p:sp>
         <p:nvSpPr>
@@ -4751,7 +4620,7 @@
           <a:bodyPr wrap="square" lIns="0" tIns="0" rIns="0" bIns="0" rtlCol="0" anchor="ctr"/>
           <a:lstStyle/>
           <a:p>
-            <a:pPr indent="0" marL="0">
+            <a:pPr marL="0" indent="0">
               <a:buNone/>
             </a:pPr>
             <a:r>
@@ -4793,6 +4662,13 @@
             <a:prstDash val="solid"/>
           </a:ln>
         </p:spPr>
+        <p:txBody>
+          <a:bodyPr/>
+          <a:lstStyle/>
+          <a:p>
+            <a:endParaRPr lang="en-US" dirty="0"/>
+          </a:p>
+        </p:txBody>
       </p:sp>
       <p:sp>
         <p:nvSpPr>
@@ -4815,7 +4691,7 @@
           <a:bodyPr wrap="square" lIns="0" tIns="0" rIns="0" bIns="0" rtlCol="0" anchor="ctr"/>
           <a:lstStyle/>
           <a:p>
-            <a:pPr indent="0" marL="0">
+            <a:pPr marL="0" indent="0">
               <a:buNone/>
             </a:pPr>
             <a:r>
@@ -4827,7 +4703,7 @@
                 <a:ea typeface="Calibri" pitchFamily="34" charset="-122"/>
                 <a:cs typeface="Calibri" pitchFamily="34" charset="-120"/>
               </a:rPr>
-              <a:t>No AI capability</a:t>
+              <a:t>Limited AI capability on “auto fill”</a:t>
             </a:r>
             <a:endParaRPr lang="en-US" sz="900" dirty="0"/>
           </a:p>
@@ -4857,6 +4733,13 @@
             <a:prstDash val="solid"/>
           </a:ln>
         </p:spPr>
+        <p:txBody>
+          <a:bodyPr/>
+          <a:lstStyle/>
+          <a:p>
+            <a:endParaRPr lang="en-US"/>
+          </a:p>
+        </p:txBody>
       </p:sp>
       <p:sp>
         <p:nvSpPr>
@@ -4879,7 +4762,7 @@
           <a:bodyPr wrap="square" lIns="0" tIns="0" rIns="0" bIns="0" rtlCol="0" anchor="ctr"/>
           <a:lstStyle/>
           <a:p>
-            <a:pPr indent="0" marL="0">
+            <a:pPr marL="0" indent="0">
               <a:buNone/>
             </a:pPr>
             <a:r>
@@ -4921,6 +4804,13 @@
             <a:prstDash val="solid"/>
           </a:ln>
         </p:spPr>
+        <p:txBody>
+          <a:bodyPr/>
+          <a:lstStyle/>
+          <a:p>
+            <a:endParaRPr lang="en-US"/>
+          </a:p>
+        </p:txBody>
       </p:sp>
       <p:sp>
         <p:nvSpPr>
@@ -4943,7 +4833,7 @@
           <a:bodyPr wrap="square" lIns="0" tIns="0" rIns="0" bIns="0" rtlCol="0" anchor="ctr"/>
           <a:lstStyle/>
           <a:p>
-            <a:pPr indent="0" marL="0">
+            <a:pPr marL="0" indent="0">
               <a:buNone/>
             </a:pPr>
             <a:r>
@@ -4985,6 +4875,13 @@
             <a:prstDash val="solid"/>
           </a:ln>
         </p:spPr>
+        <p:txBody>
+          <a:bodyPr/>
+          <a:lstStyle/>
+          <a:p>
+            <a:endParaRPr lang="en-US"/>
+          </a:p>
+        </p:txBody>
       </p:sp>
       <p:sp>
         <p:nvSpPr>
@@ -5007,7 +4904,7 @@
           <a:bodyPr wrap="square" lIns="0" tIns="0" rIns="0" bIns="0" rtlCol="0" anchor="ctr"/>
           <a:lstStyle/>
           <a:p>
-            <a:pPr indent="0" marL="0">
+            <a:pPr marL="0" indent="0">
               <a:buNone/>
             </a:pPr>
             <a:r>
@@ -5046,11 +4943,8 @@
           <a:bodyPr wrap="square" lIns="0" tIns="0" rIns="0" bIns="0" rtlCol="0" anchor="ctr"/>
           <a:lstStyle/>
           <a:p>
-            <a:pPr indent="0" marL="0">
-              <a:buNone/>
-            </a:pPr>
-            <a:r>
-              <a:rPr lang="en-US" sz="800" i="1" dirty="0">
+            <a:r>
+              <a:rPr lang="en-US" sz="1000" i="1" dirty="0">
                 <a:solidFill>
                   <a:srgbClr val="028090"/>
                 </a:solidFill>
@@ -5058,9 +4952,9 @@
                 <a:ea typeface="Calibri" pitchFamily="34" charset="-122"/>
                 <a:cs typeface="Calibri" pitchFamily="34" charset="-120"/>
               </a:rPr>
-              <a:t>Try these queries live against your portfolio in the demo.</a:t>
-            </a:r>
-            <a:endParaRPr lang="en-US" sz="800" dirty="0"/>
+              <a:t>Try these queries live against your portfolio in the demo.  Run AI Evals as required.</a:t>
+            </a:r>
+            <a:endParaRPr lang="en-US" sz="1000" dirty="0"/>
           </a:p>
         </p:txBody>
       </p:sp>
@@ -5085,7 +4979,7 @@
           <a:bodyPr wrap="square" lIns="0" tIns="0" rIns="0" bIns="0" rtlCol="0" anchor="ctr"/>
           <a:lstStyle/>
           <a:p>
-            <a:pPr algn="r" indent="0" marL="0">
+            <a:pPr marL="0" indent="0" algn="r">
               <a:buNone/>
             </a:pPr>
             <a:r>
@@ -5119,6 +5013,7 @@
         <a:solidFill>
           <a:srgbClr val="F7F8FA"/>
         </a:solidFill>
+        <a:effectLst/>
       </p:bgPr>
     </p:bg>
     <p:spTree>
@@ -5156,7 +5051,7 @@
           <a:bodyPr wrap="square" lIns="0" tIns="0" rIns="0" bIns="0" rtlCol="0" anchor="ctr"/>
           <a:lstStyle/>
           <a:p>
-            <a:pPr indent="0" marL="0">
+            <a:pPr marL="0" indent="0">
               <a:buNone/>
             </a:pPr>
             <a:r>
@@ -5195,7 +5090,7 @@
           <a:bodyPr wrap="square" lIns="0" tIns="0" rIns="0" bIns="0" rtlCol="0" anchor="ctr"/>
           <a:lstStyle/>
           <a:p>
-            <a:pPr indent="0" marL="0">
+            <a:pPr marL="0" indent="0">
               <a:buNone/>
             </a:pPr>
             <a:r>
@@ -5234,7 +5129,7 @@
           <a:bodyPr wrap="square" lIns="0" tIns="0" rIns="0" bIns="0" rtlCol="0" anchor="ctr"/>
           <a:lstStyle/>
           <a:p>
-            <a:pPr indent="0" marL="0">
+            <a:pPr marL="0" indent="0">
               <a:buNone/>
             </a:pPr>
             <a:r>
@@ -5273,7 +5168,7 @@
           <a:bodyPr wrap="square" lIns="0" tIns="0" rIns="0" bIns="0" rtlCol="0" anchor="ctr"/>
           <a:lstStyle/>
           <a:p>
-            <a:pPr indent="0" marL="0">
+            <a:pPr marL="0" indent="0">
               <a:buNone/>
             </a:pPr>
             <a:r>
@@ -5312,7 +5207,7 @@
           <a:bodyPr wrap="square" lIns="0" tIns="0" rIns="0" bIns="0" rtlCol="0" anchor="ctr"/>
           <a:lstStyle/>
           <a:p>
-            <a:pPr indent="0" marL="0">
+            <a:pPr marL="0" indent="0">
               <a:buNone/>
             </a:pPr>
             <a:r>
@@ -5351,7 +5246,7 @@
           <a:bodyPr wrap="square" lIns="0" tIns="0" rIns="0" bIns="0" rtlCol="0" anchor="ctr"/>
           <a:lstStyle/>
           <a:p>
-            <a:pPr indent="0" marL="0">
+            <a:pPr marL="0" indent="0">
               <a:buNone/>
             </a:pPr>
             <a:r>
@@ -5390,7 +5285,7 @@
           <a:bodyPr wrap="square" lIns="0" tIns="0" rIns="0" bIns="0" rtlCol="0" anchor="ctr"/>
           <a:lstStyle/>
           <a:p>
-            <a:pPr indent="0" marL="0">
+            <a:pPr marL="0" indent="0">
               <a:buNone/>
             </a:pPr>
             <a:r>
@@ -5429,7 +5324,7 @@
           <a:bodyPr wrap="square" lIns="0" tIns="0" rIns="0" bIns="0" rtlCol="0" anchor="ctr"/>
           <a:lstStyle/>
           <a:p>
-            <a:pPr indent="0" marL="0">
+            <a:pPr marL="0" indent="0">
               <a:buNone/>
             </a:pPr>
             <a:r>
@@ -5468,7 +5363,7 @@
           <a:bodyPr wrap="square" lIns="0" tIns="0" rIns="0" bIns="0" rtlCol="0" anchor="ctr"/>
           <a:lstStyle/>
           <a:p>
-            <a:pPr indent="0" marL="0">
+            <a:pPr marL="0" indent="0">
               <a:buNone/>
             </a:pPr>
             <a:r>
@@ -5507,7 +5402,7 @@
           <a:bodyPr wrap="square" lIns="0" tIns="0" rIns="0" bIns="0" rtlCol="0" anchor="ctr"/>
           <a:lstStyle/>
           <a:p>
-            <a:pPr indent="0" marL="0">
+            <a:pPr marL="0" indent="0">
               <a:buNone/>
             </a:pPr>
             <a:r>
@@ -5546,7 +5441,7 @@
           <a:bodyPr wrap="square" lIns="0" tIns="0" rIns="0" bIns="0" rtlCol="0" anchor="ctr"/>
           <a:lstStyle/>
           <a:p>
-            <a:pPr indent="0" marL="0">
+            <a:pPr marL="0" indent="0">
               <a:buNone/>
             </a:pPr>
             <a:r>
@@ -5585,7 +5480,7 @@
           <a:bodyPr wrap="square" lIns="0" tIns="0" rIns="0" bIns="0" rtlCol="0" anchor="ctr"/>
           <a:lstStyle/>
           <a:p>
-            <a:pPr indent="0" marL="0">
+            <a:pPr marL="0" indent="0">
               <a:buNone/>
             </a:pPr>
             <a:r>
@@ -5624,7 +5519,7 @@
           <a:bodyPr wrap="square" lIns="0" tIns="0" rIns="0" bIns="0" rtlCol="0" anchor="ctr"/>
           <a:lstStyle/>
           <a:p>
-            <a:pPr indent="0" marL="0">
+            <a:pPr marL="0" indent="0">
               <a:buNone/>
             </a:pPr>
             <a:r>
@@ -5663,7 +5558,7 @@
           <a:bodyPr wrap="square" lIns="0" tIns="0" rIns="0" bIns="0" rtlCol="0" anchor="ctr"/>
           <a:lstStyle/>
           <a:p>
-            <a:pPr indent="0" marL="0">
+            <a:pPr marL="0" indent="0">
               <a:buNone/>
             </a:pPr>
             <a:r>
@@ -5702,7 +5597,7 @@
           <a:bodyPr wrap="square" lIns="0" tIns="0" rIns="0" bIns="0" rtlCol="0" anchor="ctr"/>
           <a:lstStyle/>
           <a:p>
-            <a:pPr indent="0" marL="0">
+            <a:pPr marL="0" indent="0">
               <a:buNone/>
             </a:pPr>
             <a:r>
@@ -5741,7 +5636,7 @@
           <a:bodyPr wrap="square" lIns="0" tIns="0" rIns="0" bIns="0" rtlCol="0" anchor="ctr"/>
           <a:lstStyle/>
           <a:p>
-            <a:pPr indent="0" marL="0">
+            <a:pPr marL="0" indent="0">
               <a:buNone/>
             </a:pPr>
             <a:r>
@@ -5780,11 +5675,11 @@
           <a:bodyPr wrap="square" lIns="0" tIns="0" rIns="0" bIns="0" rtlCol="0" anchor="ctr"/>
           <a:lstStyle/>
           <a:p>
-            <a:pPr indent="0" marL="0">
-              <a:buNone/>
-            </a:pPr>
-            <a:r>
-              <a:rPr lang="en-US" sz="800" i="1" dirty="0">
+            <a:pPr marL="0" indent="0">
+              <a:buNone/>
+            </a:pPr>
+            <a:r>
+              <a:rPr lang="en-US" sz="1000" i="1" dirty="0">
                 <a:solidFill>
                   <a:srgbClr val="028090"/>
                 </a:solidFill>
@@ -5794,7 +5689,7 @@
               </a:rPr>
               <a:t>We'll show you which of your applications are running on end-of-support technology — detected automatically.</a:t>
             </a:r>
-            <a:endParaRPr lang="en-US" sz="800" dirty="0"/>
+            <a:endParaRPr lang="en-US" sz="1000" dirty="0"/>
           </a:p>
         </p:txBody>
       </p:sp>
@@ -5819,7 +5714,7 @@
           <a:bodyPr wrap="square" lIns="0" tIns="0" rIns="0" bIns="0" rtlCol="0" anchor="ctr"/>
           <a:lstStyle/>
           <a:p>
-            <a:pPr algn="r" indent="0" marL="0">
+            <a:pPr marL="0" indent="0" algn="r">
               <a:buNone/>
             </a:pPr>
             <a:r>
@@ -5853,6 +5748,7 @@
         <a:solidFill>
           <a:srgbClr val="F7F8FA"/>
         </a:solidFill>
+        <a:effectLst/>
       </p:bgPr>
     </p:bg>
     <p:spTree>
@@ -5890,7 +5786,7 @@
           <a:bodyPr wrap="square" lIns="0" tIns="0" rIns="0" bIns="0" rtlCol="0" anchor="ctr"/>
           <a:lstStyle/>
           <a:p>
-            <a:pPr indent="0" marL="0">
+            <a:pPr marL="0" indent="0">
               <a:buNone/>
             </a:pPr>
             <a:r>
@@ -5927,6 +5823,13 @@
           </a:solidFill>
           <a:ln/>
         </p:spPr>
+        <p:txBody>
+          <a:bodyPr/>
+          <a:lstStyle/>
+          <a:p>
+            <a:endParaRPr lang="en-US"/>
+          </a:p>
+        </p:txBody>
       </p:sp>
       <p:sp>
         <p:nvSpPr>
@@ -5949,7 +5852,7 @@
           <a:bodyPr wrap="square" lIns="0" tIns="0" rIns="0" bIns="0" rtlCol="0" anchor="ctr"/>
           <a:lstStyle/>
           <a:p>
-            <a:pPr indent="0" marL="0">
+            <a:pPr marL="0" indent="0">
               <a:buNone/>
             </a:pPr>
             <a:r>
@@ -5986,6 +5889,13 @@
           </a:solidFill>
           <a:ln/>
         </p:spPr>
+        <p:txBody>
+          <a:bodyPr/>
+          <a:lstStyle/>
+          <a:p>
+            <a:endParaRPr lang="en-US"/>
+          </a:p>
+        </p:txBody>
       </p:sp>
       <p:sp>
         <p:nvSpPr>
@@ -6008,7 +5918,7 @@
           <a:bodyPr wrap="square" lIns="0" tIns="0" rIns="0" bIns="0" rtlCol="0" anchor="ctr"/>
           <a:lstStyle/>
           <a:p>
-            <a:pPr indent="0" marL="0">
+            <a:pPr marL="0" indent="0">
               <a:buNone/>
             </a:pPr>
             <a:r>
@@ -6050,6 +5960,13 @@
             <a:prstDash val="solid"/>
           </a:ln>
         </p:spPr>
+        <p:txBody>
+          <a:bodyPr/>
+          <a:lstStyle/>
+          <a:p>
+            <a:endParaRPr lang="en-US"/>
+          </a:p>
+        </p:txBody>
       </p:sp>
       <p:sp>
         <p:nvSpPr>
@@ -6072,7 +5989,7 @@
           <a:bodyPr wrap="square" lIns="0" tIns="0" rIns="0" bIns="0" rtlCol="0" anchor="ctr"/>
           <a:lstStyle/>
           <a:p>
-            <a:pPr indent="0" marL="0">
+            <a:pPr marL="0" indent="0">
               <a:buNone/>
             </a:pPr>
             <a:r>
@@ -6114,6 +6031,13 @@
             <a:prstDash val="solid"/>
           </a:ln>
         </p:spPr>
+        <p:txBody>
+          <a:bodyPr/>
+          <a:lstStyle/>
+          <a:p>
+            <a:endParaRPr lang="en-US"/>
+          </a:p>
+        </p:txBody>
       </p:sp>
       <p:sp>
         <p:nvSpPr>
@@ -6136,7 +6060,7 @@
           <a:bodyPr wrap="square" lIns="0" tIns="0" rIns="0" bIns="0" rtlCol="0" anchor="ctr"/>
           <a:lstStyle/>
           <a:p>
-            <a:pPr indent="0" marL="0">
+            <a:pPr marL="0" indent="0">
               <a:buNone/>
             </a:pPr>
             <a:r>
@@ -6178,6 +6102,13 @@
             <a:prstDash val="solid"/>
           </a:ln>
         </p:spPr>
+        <p:txBody>
+          <a:bodyPr/>
+          <a:lstStyle/>
+          <a:p>
+            <a:endParaRPr lang="en-US"/>
+          </a:p>
+        </p:txBody>
       </p:sp>
       <p:sp>
         <p:nvSpPr>
@@ -6200,7 +6131,7 @@
           <a:bodyPr wrap="square" lIns="0" tIns="0" rIns="0" bIns="0" rtlCol="0" anchor="ctr"/>
           <a:lstStyle/>
           <a:p>
-            <a:pPr indent="0" marL="0">
+            <a:pPr marL="0" indent="0">
               <a:buNone/>
             </a:pPr>
             <a:r>
@@ -6242,6 +6173,13 @@
             <a:prstDash val="solid"/>
           </a:ln>
         </p:spPr>
+        <p:txBody>
+          <a:bodyPr/>
+          <a:lstStyle/>
+          <a:p>
+            <a:endParaRPr lang="en-US"/>
+          </a:p>
+        </p:txBody>
       </p:sp>
       <p:sp>
         <p:nvSpPr>
@@ -6264,7 +6202,7 @@
           <a:bodyPr wrap="square" lIns="0" tIns="0" rIns="0" bIns="0" rtlCol="0" anchor="ctr"/>
           <a:lstStyle/>
           <a:p>
-            <a:pPr indent="0" marL="0">
+            <a:pPr marL="0" indent="0">
               <a:buNone/>
             </a:pPr>
             <a:r>
@@ -6306,6 +6244,13 @@
             <a:prstDash val="solid"/>
           </a:ln>
         </p:spPr>
+        <p:txBody>
+          <a:bodyPr/>
+          <a:lstStyle/>
+          <a:p>
+            <a:endParaRPr lang="en-US"/>
+          </a:p>
+        </p:txBody>
       </p:sp>
       <p:sp>
         <p:nvSpPr>
@@ -6328,7 +6273,7 @@
           <a:bodyPr wrap="square" lIns="0" tIns="0" rIns="0" bIns="0" rtlCol="0" anchor="ctr"/>
           <a:lstStyle/>
           <a:p>
-            <a:pPr indent="0" marL="0">
+            <a:pPr marL="0" indent="0">
               <a:buNone/>
             </a:pPr>
             <a:r>
@@ -6370,6 +6315,13 @@
             <a:prstDash val="solid"/>
           </a:ln>
         </p:spPr>
+        <p:txBody>
+          <a:bodyPr/>
+          <a:lstStyle/>
+          <a:p>
+            <a:endParaRPr lang="en-US"/>
+          </a:p>
+        </p:txBody>
       </p:sp>
       <p:sp>
         <p:nvSpPr>
@@ -6392,7 +6344,7 @@
           <a:bodyPr wrap="square" lIns="0" tIns="0" rIns="0" bIns="0" rtlCol="0" anchor="ctr"/>
           <a:lstStyle/>
           <a:p>
-            <a:pPr indent="0" marL="0">
+            <a:pPr marL="0" indent="0">
               <a:buNone/>
             </a:pPr>
             <a:r>
@@ -6434,6 +6386,13 @@
             <a:prstDash val="solid"/>
           </a:ln>
         </p:spPr>
+        <p:txBody>
+          <a:bodyPr/>
+          <a:lstStyle/>
+          <a:p>
+            <a:endParaRPr lang="en-US"/>
+          </a:p>
+        </p:txBody>
       </p:sp>
       <p:sp>
         <p:nvSpPr>
@@ -6456,7 +6415,7 @@
           <a:bodyPr wrap="square" lIns="0" tIns="0" rIns="0" bIns="0" rtlCol="0" anchor="ctr"/>
           <a:lstStyle/>
           <a:p>
-            <a:pPr indent="0" marL="0">
+            <a:pPr marL="0" indent="0">
               <a:buNone/>
             </a:pPr>
             <a:r>
@@ -6498,6 +6457,13 @@
             <a:prstDash val="solid"/>
           </a:ln>
         </p:spPr>
+        <p:txBody>
+          <a:bodyPr/>
+          <a:lstStyle/>
+          <a:p>
+            <a:endParaRPr lang="en-US"/>
+          </a:p>
+        </p:txBody>
       </p:sp>
       <p:sp>
         <p:nvSpPr>
@@ -6520,7 +6486,7 @@
           <a:bodyPr wrap="square" lIns="0" tIns="0" rIns="0" bIns="0" rtlCol="0" anchor="ctr"/>
           <a:lstStyle/>
           <a:p>
-            <a:pPr indent="0" marL="0">
+            <a:pPr marL="0" indent="0">
               <a:buNone/>
             </a:pPr>
             <a:r>
@@ -6559,11 +6525,11 @@
           <a:bodyPr wrap="square" lIns="0" tIns="0" rIns="0" bIns="0" rtlCol="0" anchor="ctr"/>
           <a:lstStyle/>
           <a:p>
-            <a:pPr indent="0" marL="0">
-              <a:buNone/>
-            </a:pPr>
-            <a:r>
-              <a:rPr lang="en-US" sz="800" i="1" dirty="0">
+            <a:pPr marL="0" indent="0">
+              <a:buNone/>
+            </a:pPr>
+            <a:r>
+              <a:rPr lang="en-US" sz="1000" i="1" dirty="0">
                 <a:solidFill>
                   <a:srgbClr val="028090"/>
                 </a:solidFill>
@@ -6573,7 +6539,7 @@
               </a:rPr>
               <a:t>We'll show you which of your applications are running on end-of-support technology — detected automatically.</a:t>
             </a:r>
-            <a:endParaRPr lang="en-US" sz="800" dirty="0"/>
+            <a:endParaRPr lang="en-US" sz="1000" dirty="0"/>
           </a:p>
         </p:txBody>
       </p:sp>
@@ -6598,7 +6564,7 @@
           <a:bodyPr wrap="square" lIns="0" tIns="0" rIns="0" bIns="0" rtlCol="0" anchor="ctr"/>
           <a:lstStyle/>
           <a:p>
-            <a:pPr algn="r" indent="0" marL="0">
+            <a:pPr marL="0" indent="0" algn="r">
               <a:buNone/>
             </a:pPr>
             <a:r>
@@ -6632,6 +6598,7 @@
         <a:solidFill>
           <a:srgbClr val="F7F8FA"/>
         </a:solidFill>
+        <a:effectLst/>
       </p:bgPr>
     </p:bg>
     <p:spTree>
@@ -6669,7 +6636,7 @@
           <a:bodyPr wrap="square" lIns="0" tIns="0" rIns="0" bIns="0" rtlCol="0" anchor="ctr"/>
           <a:lstStyle/>
           <a:p>
-            <a:pPr indent="0" marL="0">
+            <a:pPr marL="0" indent="0">
               <a:buNone/>
             </a:pPr>
             <a:r>
@@ -6708,7 +6675,7 @@
           <a:bodyPr wrap="square" lIns="0" tIns="0" rIns="0" bIns="0" rtlCol="0" anchor="ctr"/>
           <a:lstStyle/>
           <a:p>
-            <a:pPr indent="0" marL="0">
+            <a:pPr marL="0" indent="0">
               <a:buNone/>
             </a:pPr>
             <a:r>
@@ -6734,7 +6701,7 @@
         </p:nvSpPr>
         <p:spPr>
           <a:xfrm>
-            <a:off x="548640" y="1371600"/>
+            <a:off x="548640" y="1426301"/>
             <a:ext cx="2011680" cy="228600"/>
           </a:xfrm>
           <a:prstGeom prst="rect">
@@ -6747,7 +6714,7 @@
           <a:bodyPr wrap="square" lIns="0" tIns="0" rIns="0" bIns="0" rtlCol="0" anchor="ctr"/>
           <a:lstStyle/>
           <a:p>
-            <a:pPr indent="0" marL="0">
+            <a:pPr marL="0" indent="0">
               <a:buNone/>
             </a:pPr>
             <a:r>
@@ -6786,7 +6753,7 @@
           <a:bodyPr wrap="square" lIns="0" tIns="0" rIns="0" bIns="0" rtlCol="0" anchor="ctr"/>
           <a:lstStyle/>
           <a:p>
-            <a:pPr indent="0" marL="0">
+            <a:pPr marL="0" indent="0">
               <a:buNone/>
             </a:pPr>
             <a:r>
@@ -6812,7 +6779,7 @@
         </p:nvSpPr>
         <p:spPr>
           <a:xfrm>
-            <a:off x="548640" y="1874520"/>
+            <a:off x="548640" y="1939018"/>
             <a:ext cx="2011680" cy="228600"/>
           </a:xfrm>
           <a:prstGeom prst="rect">
@@ -6825,7 +6792,7 @@
           <a:bodyPr wrap="square" lIns="0" tIns="0" rIns="0" bIns="0" rtlCol="0" anchor="ctr"/>
           <a:lstStyle/>
           <a:p>
-            <a:pPr indent="0" marL="0">
+            <a:pPr marL="0" indent="0">
               <a:buNone/>
             </a:pPr>
             <a:r>
@@ -6864,7 +6831,7 @@
           <a:bodyPr wrap="square" lIns="0" tIns="0" rIns="0" bIns="0" rtlCol="0" anchor="ctr"/>
           <a:lstStyle/>
           <a:p>
-            <a:pPr indent="0" marL="0">
+            <a:pPr marL="0" indent="0">
               <a:buNone/>
             </a:pPr>
             <a:r>
@@ -6890,7 +6857,7 @@
         </p:nvSpPr>
         <p:spPr>
           <a:xfrm>
-            <a:off x="548640" y="2377440"/>
+            <a:off x="548640" y="2438944"/>
             <a:ext cx="2011680" cy="228600"/>
           </a:xfrm>
           <a:prstGeom prst="rect">
@@ -6903,7 +6870,7 @@
           <a:bodyPr wrap="square" lIns="0" tIns="0" rIns="0" bIns="0" rtlCol="0" anchor="ctr"/>
           <a:lstStyle/>
           <a:p>
-            <a:pPr indent="0" marL="0">
+            <a:pPr marL="0" indent="0">
               <a:buNone/>
             </a:pPr>
             <a:r>
@@ -6942,7 +6909,7 @@
           <a:bodyPr wrap="square" lIns="0" tIns="0" rIns="0" bIns="0" rtlCol="0" anchor="ctr"/>
           <a:lstStyle/>
           <a:p>
-            <a:pPr indent="0" marL="0">
+            <a:pPr marL="0" indent="0">
               <a:buNone/>
             </a:pPr>
             <a:r>
@@ -6968,7 +6935,7 @@
         </p:nvSpPr>
         <p:spPr>
           <a:xfrm>
-            <a:off x="548640" y="2880360"/>
+            <a:off x="548640" y="2985951"/>
             <a:ext cx="2011680" cy="228600"/>
           </a:xfrm>
           <a:prstGeom prst="rect">
@@ -6981,7 +6948,7 @@
           <a:bodyPr wrap="square" lIns="0" tIns="0" rIns="0" bIns="0" rtlCol="0" anchor="ctr"/>
           <a:lstStyle/>
           <a:p>
-            <a:pPr indent="0" marL="0">
+            <a:pPr marL="0" indent="0">
               <a:buNone/>
             </a:pPr>
             <a:r>
@@ -7020,7 +6987,7 @@
           <a:bodyPr wrap="square" lIns="0" tIns="0" rIns="0" bIns="0" rtlCol="0" anchor="ctr"/>
           <a:lstStyle/>
           <a:p>
-            <a:pPr indent="0" marL="0">
+            <a:pPr marL="0" indent="0">
               <a:buNone/>
             </a:pPr>
             <a:r>
@@ -7059,7 +7026,7 @@
           <a:bodyPr wrap="square" lIns="0" tIns="0" rIns="0" bIns="0" rtlCol="0" anchor="ctr"/>
           <a:lstStyle/>
           <a:p>
-            <a:pPr indent="0" marL="0">
+            <a:pPr marL="0" indent="0">
               <a:buNone/>
             </a:pPr>
             <a:r>
@@ -7098,7 +7065,7 @@
           <a:bodyPr wrap="square" lIns="0" tIns="0" rIns="0" bIns="0" rtlCol="0" anchor="ctr"/>
           <a:lstStyle/>
           <a:p>
-            <a:pPr indent="0" marL="0">
+            <a:pPr marL="0" indent="0">
               <a:buNone/>
             </a:pPr>
             <a:r>
@@ -7137,7 +7104,7 @@
           <a:bodyPr wrap="square" lIns="0" tIns="0" rIns="0" bIns="0" rtlCol="0" anchor="ctr"/>
           <a:lstStyle/>
           <a:p>
-            <a:pPr indent="0" marL="0">
+            <a:pPr marL="0" indent="0">
               <a:buNone/>
             </a:pPr>
             <a:r>
@@ -7176,7 +7143,7 @@
           <a:bodyPr wrap="square" lIns="0" tIns="0" rIns="0" bIns="0" rtlCol="0" anchor="ctr"/>
           <a:lstStyle/>
           <a:p>
-            <a:pPr indent="0" marL="0">
+            <a:pPr marL="0" indent="0">
               <a:buNone/>
             </a:pPr>
             <a:r>
@@ -7215,7 +7182,7 @@
           <a:bodyPr wrap="square" lIns="0" tIns="0" rIns="0" bIns="0" rtlCol="0" anchor="ctr"/>
           <a:lstStyle/>
           <a:p>
-            <a:pPr indent="0" marL="0">
+            <a:pPr marL="0" indent="0">
               <a:buNone/>
             </a:pPr>
             <a:r>
@@ -7254,7 +7221,7 @@
           <a:bodyPr wrap="square" lIns="0" tIns="0" rIns="0" bIns="0" rtlCol="0" anchor="ctr"/>
           <a:lstStyle/>
           <a:p>
-            <a:pPr indent="0" marL="0">
+            <a:pPr marL="0" indent="0">
               <a:buNone/>
             </a:pPr>
             <a:r>
@@ -7293,11 +7260,11 @@
           <a:bodyPr wrap="square" lIns="0" tIns="0" rIns="0" bIns="0" rtlCol="0" anchor="ctr"/>
           <a:lstStyle/>
           <a:p>
-            <a:pPr indent="0" marL="0">
-              <a:buNone/>
-            </a:pPr>
-            <a:r>
-              <a:rPr lang="en-US" sz="800" i="1" dirty="0">
+            <a:pPr marL="0" indent="0">
+              <a:buNone/>
+            </a:pPr>
+            <a:r>
+              <a:rPr lang="en-US" sz="1000" i="1" dirty="0">
                 <a:solidFill>
                   <a:srgbClr val="028090"/>
                 </a:solidFill>
@@ -7307,7 +7274,7 @@
               </a:rPr>
               <a:t>Let's discuss your identity provider requirements and plan who gets invited first.</a:t>
             </a:r>
-            <a:endParaRPr lang="en-US" sz="800" dirty="0"/>
+            <a:endParaRPr lang="en-US" sz="1000" dirty="0"/>
           </a:p>
         </p:txBody>
       </p:sp>
@@ -7332,7 +7299,7 @@
           <a:bodyPr wrap="square" lIns="0" tIns="0" rIns="0" bIns="0" rtlCol="0" anchor="ctr"/>
           <a:lstStyle/>
           <a:p>
-            <a:pPr algn="r" indent="0" marL="0">
+            <a:pPr marL="0" indent="0" algn="r">
               <a:buNone/>
             </a:pPr>
             <a:r>
@@ -7366,6 +7333,7 @@
         <a:solidFill>
           <a:srgbClr val="F7F8FA"/>
         </a:solidFill>
+        <a:effectLst/>
       </p:bgPr>
     </p:bg>
     <p:spTree>
@@ -7403,7 +7371,7 @@
           <a:bodyPr wrap="square" lIns="0" tIns="0" rIns="0" bIns="0" rtlCol="0" anchor="ctr"/>
           <a:lstStyle/>
           <a:p>
-            <a:pPr indent="0" marL="0">
+            <a:pPr marL="0" indent="0">
               <a:buNone/>
             </a:pPr>
             <a:r>
@@ -7440,6 +7408,13 @@
           </a:solidFill>
           <a:ln/>
         </p:spPr>
+        <p:txBody>
+          <a:bodyPr/>
+          <a:lstStyle/>
+          <a:p>
+            <a:endParaRPr lang="en-US"/>
+          </a:p>
+        </p:txBody>
       </p:sp>
       <p:sp>
         <p:nvSpPr>
@@ -7462,7 +7437,7 @@
           <a:bodyPr wrap="square" lIns="0" tIns="0" rIns="0" bIns="0" rtlCol="0" anchor="ctr"/>
           <a:lstStyle/>
           <a:p>
-            <a:pPr indent="0" marL="0">
+            <a:pPr marL="0" indent="0">
               <a:buNone/>
             </a:pPr>
             <a:r>
@@ -7499,6 +7474,13 @@
           </a:solidFill>
           <a:ln/>
         </p:spPr>
+        <p:txBody>
+          <a:bodyPr/>
+          <a:lstStyle/>
+          <a:p>
+            <a:endParaRPr lang="en-US"/>
+          </a:p>
+        </p:txBody>
       </p:sp>
       <p:sp>
         <p:nvSpPr>
@@ -7521,7 +7503,7 @@
           <a:bodyPr wrap="square" lIns="0" tIns="0" rIns="0" bIns="0" rtlCol="0" anchor="ctr"/>
           <a:lstStyle/>
           <a:p>
-            <a:pPr indent="0" marL="0">
+            <a:pPr marL="0" indent="0">
               <a:buNone/>
             </a:pPr>
             <a:r>
@@ -7563,6 +7545,13 @@
             <a:prstDash val="solid"/>
           </a:ln>
         </p:spPr>
+        <p:txBody>
+          <a:bodyPr/>
+          <a:lstStyle/>
+          <a:p>
+            <a:endParaRPr lang="en-US"/>
+          </a:p>
+        </p:txBody>
       </p:sp>
       <p:sp>
         <p:nvSpPr>
@@ -7585,7 +7574,7 @@
           <a:bodyPr wrap="square" lIns="0" tIns="0" rIns="0" bIns="0" rtlCol="0" anchor="ctr"/>
           <a:lstStyle/>
           <a:p>
-            <a:pPr indent="0" marL="0">
+            <a:pPr marL="0" indent="0">
               <a:buNone/>
             </a:pPr>
             <a:r>
@@ -7627,6 +7616,13 @@
             <a:prstDash val="solid"/>
           </a:ln>
         </p:spPr>
+        <p:txBody>
+          <a:bodyPr/>
+          <a:lstStyle/>
+          <a:p>
+            <a:endParaRPr lang="en-US"/>
+          </a:p>
+        </p:txBody>
       </p:sp>
       <p:sp>
         <p:nvSpPr>
@@ -7649,7 +7645,7 @@
           <a:bodyPr wrap="square" lIns="0" tIns="0" rIns="0" bIns="0" rtlCol="0" anchor="ctr"/>
           <a:lstStyle/>
           <a:p>
-            <a:pPr indent="0" marL="0">
+            <a:pPr marL="0" indent="0">
               <a:buNone/>
             </a:pPr>
             <a:r>
@@ -7691,6 +7687,13 @@
             <a:prstDash val="solid"/>
           </a:ln>
         </p:spPr>
+        <p:txBody>
+          <a:bodyPr/>
+          <a:lstStyle/>
+          <a:p>
+            <a:endParaRPr lang="en-US"/>
+          </a:p>
+        </p:txBody>
       </p:sp>
       <p:sp>
         <p:nvSpPr>
@@ -7713,7 +7716,7 @@
           <a:bodyPr wrap="square" lIns="0" tIns="0" rIns="0" bIns="0" rtlCol="0" anchor="ctr"/>
           <a:lstStyle/>
           <a:p>
-            <a:pPr indent="0" marL="0">
+            <a:pPr marL="0" indent="0">
               <a:buNone/>
             </a:pPr>
             <a:r>
@@ -7755,6 +7758,13 @@
             <a:prstDash val="solid"/>
           </a:ln>
         </p:spPr>
+        <p:txBody>
+          <a:bodyPr/>
+          <a:lstStyle/>
+          <a:p>
+            <a:endParaRPr lang="en-US"/>
+          </a:p>
+        </p:txBody>
       </p:sp>
       <p:sp>
         <p:nvSpPr>
@@ -7777,7 +7787,7 @@
           <a:bodyPr wrap="square" lIns="0" tIns="0" rIns="0" bIns="0" rtlCol="0" anchor="ctr"/>
           <a:lstStyle/>
           <a:p>
-            <a:pPr indent="0" marL="0">
+            <a:pPr marL="0" indent="0">
               <a:buNone/>
             </a:pPr>
             <a:r>
@@ -7819,6 +7829,13 @@
             <a:prstDash val="solid"/>
           </a:ln>
         </p:spPr>
+        <p:txBody>
+          <a:bodyPr/>
+          <a:lstStyle/>
+          <a:p>
+            <a:endParaRPr lang="en-US"/>
+          </a:p>
+        </p:txBody>
       </p:sp>
       <p:sp>
         <p:nvSpPr>
@@ -7841,7 +7858,7 @@
           <a:bodyPr wrap="square" lIns="0" tIns="0" rIns="0" bIns="0" rtlCol="0" anchor="ctr"/>
           <a:lstStyle/>
           <a:p>
-            <a:pPr indent="0" marL="0">
+            <a:pPr marL="0" indent="0">
               <a:buNone/>
             </a:pPr>
             <a:r>
@@ -7883,6 +7900,13 @@
             <a:prstDash val="solid"/>
           </a:ln>
         </p:spPr>
+        <p:txBody>
+          <a:bodyPr/>
+          <a:lstStyle/>
+          <a:p>
+            <a:endParaRPr lang="en-US"/>
+          </a:p>
+        </p:txBody>
       </p:sp>
       <p:sp>
         <p:nvSpPr>
@@ -7905,7 +7929,7 @@
           <a:bodyPr wrap="square" lIns="0" tIns="0" rIns="0" bIns="0" rtlCol="0" anchor="ctr"/>
           <a:lstStyle/>
           <a:p>
-            <a:pPr indent="0" marL="0">
+            <a:pPr marL="0" indent="0">
               <a:buNone/>
             </a:pPr>
             <a:r>
@@ -7947,6 +7971,13 @@
             <a:prstDash val="solid"/>
           </a:ln>
         </p:spPr>
+        <p:txBody>
+          <a:bodyPr/>
+          <a:lstStyle/>
+          <a:p>
+            <a:endParaRPr lang="en-US"/>
+          </a:p>
+        </p:txBody>
       </p:sp>
       <p:sp>
         <p:nvSpPr>
@@ -7969,7 +8000,7 @@
           <a:bodyPr wrap="square" lIns="0" tIns="0" rIns="0" bIns="0" rtlCol="0" anchor="ctr"/>
           <a:lstStyle/>
           <a:p>
-            <a:pPr indent="0" marL="0">
+            <a:pPr marL="0" indent="0">
               <a:buNone/>
             </a:pPr>
             <a:r>
@@ -8011,6 +8042,13 @@
             <a:prstDash val="solid"/>
           </a:ln>
         </p:spPr>
+        <p:txBody>
+          <a:bodyPr/>
+          <a:lstStyle/>
+          <a:p>
+            <a:endParaRPr lang="en-US"/>
+          </a:p>
+        </p:txBody>
       </p:sp>
       <p:sp>
         <p:nvSpPr>
@@ -8033,7 +8071,7 @@
           <a:bodyPr wrap="square" lIns="0" tIns="0" rIns="0" bIns="0" rtlCol="0" anchor="ctr"/>
           <a:lstStyle/>
           <a:p>
-            <a:pPr indent="0" marL="0">
+            <a:pPr marL="0" indent="0">
               <a:buNone/>
             </a:pPr>
             <a:r>
@@ -8072,11 +8110,11 @@
           <a:bodyPr wrap="square" lIns="0" tIns="0" rIns="0" bIns="0" rtlCol="0" anchor="ctr"/>
           <a:lstStyle/>
           <a:p>
-            <a:pPr indent="0" marL="0">
-              <a:buNone/>
-            </a:pPr>
-            <a:r>
-              <a:rPr lang="en-US" sz="800" i="1" dirty="0">
+            <a:pPr marL="0" indent="0">
+              <a:buNone/>
+            </a:pPr>
+            <a:r>
+              <a:rPr lang="en-US" sz="1000" i="1" dirty="0">
                 <a:solidFill>
                   <a:srgbClr val="028090"/>
                 </a:solidFill>
@@ -8086,7 +8124,7 @@
               </a:rPr>
               <a:t>Let's discuss your identity provider requirements and plan who gets invited first.</a:t>
             </a:r>
-            <a:endParaRPr lang="en-US" sz="800" dirty="0"/>
+            <a:endParaRPr lang="en-US" sz="1000" dirty="0"/>
           </a:p>
         </p:txBody>
       </p:sp>
@@ -8111,7 +8149,7 @@
           <a:bodyPr wrap="square" lIns="0" tIns="0" rIns="0" bIns="0" rtlCol="0" anchor="ctr"/>
           <a:lstStyle/>
           <a:p>
-            <a:pPr algn="r" indent="0" marL="0">
+            <a:pPr marL="0" indent="0" algn="r">
               <a:buNone/>
             </a:pPr>
             <a:r>
@@ -8145,6 +8183,7 @@
         <a:solidFill>
           <a:srgbClr val="F7F8FA"/>
         </a:solidFill>
+        <a:effectLst/>
       </p:bgPr>
     </p:bg>
     <p:spTree>
@@ -8182,7 +8221,7 @@
           <a:bodyPr wrap="square" lIns="0" tIns="0" rIns="0" bIns="0" rtlCol="0" anchor="ctr"/>
           <a:lstStyle/>
           <a:p>
-            <a:pPr indent="0" marL="0">
+            <a:pPr marL="0" indent="0">
               <a:buNone/>
             </a:pPr>
             <a:r>
@@ -8221,7 +8260,7 @@
           <a:bodyPr wrap="square" lIns="0" tIns="0" rIns="0" bIns="0" rtlCol="0" anchor="ctr"/>
           <a:lstStyle/>
           <a:p>
-            <a:pPr indent="0" marL="0">
+            <a:pPr marL="0" indent="0">
               <a:buNone/>
             </a:pPr>
             <a:r>
@@ -8260,7 +8299,7 @@
           <a:bodyPr wrap="square" lIns="0" tIns="0" rIns="0" bIns="0" rtlCol="0" anchor="ctr"/>
           <a:lstStyle/>
           <a:p>
-            <a:pPr indent="0" marL="0">
+            <a:pPr marL="0" indent="0">
               <a:buNone/>
             </a:pPr>
             <a:r>
@@ -8299,7 +8338,7 @@
           <a:bodyPr wrap="square" lIns="0" tIns="0" rIns="0" bIns="0" rtlCol="0" anchor="ctr"/>
           <a:lstStyle/>
           <a:p>
-            <a:pPr indent="0" marL="0">
+            <a:pPr marL="0" indent="0">
               <a:buNone/>
             </a:pPr>
             <a:r>
@@ -8338,7 +8377,7 @@
           <a:bodyPr wrap="square" lIns="0" tIns="0" rIns="0" bIns="0" rtlCol="0" anchor="ctr"/>
           <a:lstStyle/>
           <a:p>
-            <a:pPr indent="0" marL="0">
+            <a:pPr marL="0" indent="0">
               <a:buNone/>
             </a:pPr>
             <a:r>
@@ -8377,7 +8416,7 @@
           <a:bodyPr wrap="square" lIns="0" tIns="0" rIns="0" bIns="0" rtlCol="0" anchor="ctr"/>
           <a:lstStyle/>
           <a:p>
-            <a:pPr indent="0" marL="0">
+            <a:pPr marL="0" indent="0">
               <a:buNone/>
             </a:pPr>
             <a:r>
@@ -8416,7 +8455,7 @@
           <a:bodyPr wrap="square" lIns="0" tIns="0" rIns="0" bIns="0" rtlCol="0" anchor="ctr"/>
           <a:lstStyle/>
           <a:p>
-            <a:pPr indent="0" marL="0">
+            <a:pPr marL="0" indent="0">
               <a:buNone/>
             </a:pPr>
             <a:r>
@@ -8455,7 +8494,7 @@
           <a:bodyPr wrap="square" lIns="0" tIns="0" rIns="0" bIns="0" rtlCol="0" anchor="ctr"/>
           <a:lstStyle/>
           <a:p>
-            <a:pPr indent="0" marL="0">
+            <a:pPr marL="0" indent="0">
               <a:buNone/>
             </a:pPr>
             <a:r>
@@ -8494,11 +8533,8 @@
           <a:bodyPr wrap="square" lIns="0" tIns="0" rIns="0" bIns="0" rtlCol="0" anchor="ctr"/>
           <a:lstStyle/>
           <a:p>
-            <a:pPr indent="0" marL="0">
-              <a:buNone/>
-            </a:pPr>
-            <a:r>
-              <a:rPr lang="en-US" sz="800" i="1" dirty="0">
+            <a:r>
+              <a:rPr lang="en-US" sz="1000" i="1" dirty="0">
                 <a:solidFill>
                   <a:srgbClr val="028090"/>
                 </a:solidFill>
@@ -8506,9 +8542,9 @@
                 <a:ea typeface="Calibri" pitchFamily="34" charset="-122"/>
                 <a:cs typeface="Calibri" pitchFamily="34" charset="-120"/>
               </a:rPr>
-              <a:t>Your data is already structured — we'll show you the mapping.</a:t>
-            </a:r>
-            <a:endParaRPr lang="en-US" sz="800" dirty="0"/>
+              <a:t>Your data in the new structure; we'll show you the mapping.</a:t>
+            </a:r>
+            <a:endParaRPr lang="en-US" sz="1000" dirty="0"/>
           </a:p>
         </p:txBody>
       </p:sp>
@@ -8533,7 +8569,7 @@
           <a:bodyPr wrap="square" lIns="0" tIns="0" rIns="0" bIns="0" rtlCol="0" anchor="ctr"/>
           <a:lstStyle/>
           <a:p>
-            <a:pPr algn="r" indent="0" marL="0">
+            <a:pPr marL="0" indent="0" algn="r">
               <a:buNone/>
             </a:pPr>
             <a:r>
@@ -8567,6 +8603,7 @@
         <a:solidFill>
           <a:srgbClr val="F7F8FA"/>
         </a:solidFill>
+        <a:effectLst/>
       </p:bgPr>
     </p:bg>
     <p:spTree>
@@ -8604,7 +8641,7 @@
           <a:bodyPr wrap="square" lIns="0" tIns="0" rIns="0" bIns="0" rtlCol="0" anchor="ctr"/>
           <a:lstStyle/>
           <a:p>
-            <a:pPr indent="0" marL="0">
+            <a:pPr marL="0" indent="0">
               <a:buNone/>
             </a:pPr>
             <a:r>
@@ -8641,6 +8678,13 @@
           </a:solidFill>
           <a:ln/>
         </p:spPr>
+        <p:txBody>
+          <a:bodyPr/>
+          <a:lstStyle/>
+          <a:p>
+            <a:endParaRPr lang="en-US"/>
+          </a:p>
+        </p:txBody>
       </p:sp>
       <p:sp>
         <p:nvSpPr>
@@ -8663,7 +8707,7 @@
           <a:bodyPr wrap="square" lIns="0" tIns="0" rIns="0" bIns="0" rtlCol="0" anchor="ctr"/>
           <a:lstStyle/>
           <a:p>
-            <a:pPr indent="0" marL="0">
+            <a:pPr marL="0" indent="0">
               <a:buNone/>
             </a:pPr>
             <a:r>
@@ -8700,6 +8744,13 @@
           </a:solidFill>
           <a:ln/>
         </p:spPr>
+        <p:txBody>
+          <a:bodyPr/>
+          <a:lstStyle/>
+          <a:p>
+            <a:endParaRPr lang="en-US"/>
+          </a:p>
+        </p:txBody>
       </p:sp>
       <p:sp>
         <p:nvSpPr>
@@ -8722,7 +8773,7 @@
           <a:bodyPr wrap="square" lIns="0" tIns="0" rIns="0" bIns="0" rtlCol="0" anchor="ctr"/>
           <a:lstStyle/>
           <a:p>
-            <a:pPr indent="0" marL="0">
+            <a:pPr marL="0" indent="0">
               <a:buNone/>
             </a:pPr>
             <a:r>
@@ -8764,6 +8815,13 @@
             <a:prstDash val="solid"/>
           </a:ln>
         </p:spPr>
+        <p:txBody>
+          <a:bodyPr/>
+          <a:lstStyle/>
+          <a:p>
+            <a:endParaRPr lang="en-US"/>
+          </a:p>
+        </p:txBody>
       </p:sp>
       <p:sp>
         <p:nvSpPr>
@@ -8786,7 +8844,7 @@
           <a:bodyPr wrap="square" lIns="0" tIns="0" rIns="0" bIns="0" rtlCol="0" anchor="ctr"/>
           <a:lstStyle/>
           <a:p>
-            <a:pPr indent="0" marL="0">
+            <a:pPr marL="0" indent="0">
               <a:buNone/>
             </a:pPr>
             <a:r>
@@ -8828,6 +8886,13 @@
             <a:prstDash val="solid"/>
           </a:ln>
         </p:spPr>
+        <p:txBody>
+          <a:bodyPr/>
+          <a:lstStyle/>
+          <a:p>
+            <a:endParaRPr lang="en-US"/>
+          </a:p>
+        </p:txBody>
       </p:sp>
       <p:sp>
         <p:nvSpPr>
@@ -8850,7 +8915,7 @@
           <a:bodyPr wrap="square" lIns="0" tIns="0" rIns="0" bIns="0" rtlCol="0" anchor="ctr"/>
           <a:lstStyle/>
           <a:p>
-            <a:pPr indent="0" marL="0">
+            <a:pPr marL="0" indent="0">
               <a:buNone/>
             </a:pPr>
             <a:r>
@@ -8892,6 +8957,13 @@
             <a:prstDash val="solid"/>
           </a:ln>
         </p:spPr>
+        <p:txBody>
+          <a:bodyPr/>
+          <a:lstStyle/>
+          <a:p>
+            <a:endParaRPr lang="en-US"/>
+          </a:p>
+        </p:txBody>
       </p:sp>
       <p:sp>
         <p:nvSpPr>
@@ -8914,7 +8986,7 @@
           <a:bodyPr wrap="square" lIns="0" tIns="0" rIns="0" bIns="0" rtlCol="0" anchor="ctr"/>
           <a:lstStyle/>
           <a:p>
-            <a:pPr indent="0" marL="0">
+            <a:pPr marL="0" indent="0">
               <a:buNone/>
             </a:pPr>
             <a:r>
@@ -8956,6 +9028,13 @@
             <a:prstDash val="solid"/>
           </a:ln>
         </p:spPr>
+        <p:txBody>
+          <a:bodyPr/>
+          <a:lstStyle/>
+          <a:p>
+            <a:endParaRPr lang="en-US"/>
+          </a:p>
+        </p:txBody>
       </p:sp>
       <p:sp>
         <p:nvSpPr>
@@ -8978,7 +9057,7 @@
           <a:bodyPr wrap="square" lIns="0" tIns="0" rIns="0" bIns="0" rtlCol="0" anchor="ctr"/>
           <a:lstStyle/>
           <a:p>
-            <a:pPr indent="0" marL="0">
+            <a:pPr marL="0" indent="0">
               <a:buNone/>
             </a:pPr>
             <a:r>
@@ -9020,6 +9099,13 @@
             <a:prstDash val="solid"/>
           </a:ln>
         </p:spPr>
+        <p:txBody>
+          <a:bodyPr/>
+          <a:lstStyle/>
+          <a:p>
+            <a:endParaRPr lang="en-US"/>
+          </a:p>
+        </p:txBody>
       </p:sp>
       <p:sp>
         <p:nvSpPr>
@@ -9042,7 +9128,7 @@
           <a:bodyPr wrap="square" lIns="0" tIns="0" rIns="0" bIns="0" rtlCol="0" anchor="ctr"/>
           <a:lstStyle/>
           <a:p>
-            <a:pPr indent="0" marL="0">
+            <a:pPr marL="0" indent="0">
               <a:buNone/>
             </a:pPr>
             <a:r>
@@ -9084,6 +9170,13 @@
             <a:prstDash val="solid"/>
           </a:ln>
         </p:spPr>
+        <p:txBody>
+          <a:bodyPr/>
+          <a:lstStyle/>
+          <a:p>
+            <a:endParaRPr lang="en-US"/>
+          </a:p>
+        </p:txBody>
       </p:sp>
       <p:sp>
         <p:nvSpPr>
@@ -9106,7 +9199,7 @@
           <a:bodyPr wrap="square" lIns="0" tIns="0" rIns="0" bIns="0" rtlCol="0" anchor="ctr"/>
           <a:lstStyle/>
           <a:p>
-            <a:pPr indent="0" marL="0">
+            <a:pPr marL="0" indent="0">
               <a:buNone/>
             </a:pPr>
             <a:r>
@@ -9145,11 +9238,11 @@
           <a:bodyPr wrap="square" lIns="0" tIns="0" rIns="0" bIns="0" rtlCol="0" anchor="ctr"/>
           <a:lstStyle/>
           <a:p>
-            <a:pPr indent="0" marL="0">
-              <a:buNone/>
-            </a:pPr>
-            <a:r>
-              <a:rPr lang="en-US" sz="800" i="1" dirty="0">
+            <a:pPr marL="0" indent="0">
+              <a:buNone/>
+            </a:pPr>
+            <a:r>
+              <a:rPr lang="en-US" sz="1000" i="1" dirty="0">
                 <a:solidFill>
                   <a:srgbClr val="028090"/>
                 </a:solidFill>
@@ -9157,9 +9250,9 @@
                 <a:ea typeface="Calibri" pitchFamily="34" charset="-122"/>
                 <a:cs typeface="Calibri" pitchFamily="34" charset="-120"/>
               </a:rPr>
-              <a:t>Your data is already structured — we'll show you the mapping.</a:t>
-            </a:r>
-            <a:endParaRPr lang="en-US" sz="800" dirty="0"/>
+              <a:t>Your data in the new structure; we'll show you the mapping.</a:t>
+            </a:r>
+            <a:endParaRPr lang="en-US" sz="1000" dirty="0"/>
           </a:p>
         </p:txBody>
       </p:sp>
@@ -9184,7 +9277,7 @@
           <a:bodyPr wrap="square" lIns="0" tIns="0" rIns="0" bIns="0" rtlCol="0" anchor="ctr"/>
           <a:lstStyle/>
           <a:p>
-            <a:pPr algn="r" indent="0" marL="0">
+            <a:pPr marL="0" indent="0" algn="r">
               <a:buNone/>
             </a:pPr>
             <a:r>
@@ -9218,6 +9311,7 @@
         <a:solidFill>
           <a:srgbClr val="F7F8FA"/>
         </a:solidFill>
+        <a:effectLst/>
       </p:bgPr>
     </p:bg>
     <p:spTree>
@@ -9255,7 +9349,7 @@
           <a:bodyPr wrap="square" lIns="0" tIns="0" rIns="0" bIns="0" rtlCol="0" anchor="ctr"/>
           <a:lstStyle/>
           <a:p>
-            <a:pPr indent="0" marL="0">
+            <a:pPr marL="0" indent="0">
               <a:buNone/>
             </a:pPr>
             <a:r>
@@ -9294,7 +9388,7 @@
           <a:bodyPr wrap="square" lIns="0" tIns="0" rIns="0" bIns="0" rtlCol="0" anchor="ctr"/>
           <a:lstStyle/>
           <a:p>
-            <a:pPr indent="0" marL="0">
+            <a:pPr marL="0" indent="0">
               <a:buNone/>
             </a:pPr>
             <a:r>
@@ -9333,7 +9427,7 @@
           <a:bodyPr wrap="square" lIns="0" tIns="0" rIns="0" bIns="0" rtlCol="0" anchor="ctr"/>
           <a:lstStyle/>
           <a:p>
-            <a:pPr indent="0" marL="0">
+            <a:pPr marL="0" indent="0">
               <a:buNone/>
             </a:pPr>
             <a:r>
@@ -9359,7 +9453,7 @@
         </p:nvSpPr>
         <p:spPr>
           <a:xfrm>
-            <a:off x="2011680" y="1645920"/>
+            <a:off x="2011680" y="1463040"/>
             <a:ext cx="6583680" cy="731520"/>
           </a:xfrm>
           <a:prstGeom prst="rect">
@@ -9372,7 +9466,7 @@
           <a:bodyPr wrap="square" lIns="0" tIns="0" rIns="0" bIns="0" rtlCol="0" anchor="ctr"/>
           <a:lstStyle/>
           <a:p>
-            <a:pPr indent="0" marL="0">
+            <a:pPr marL="0" indent="0">
               <a:buNone/>
             </a:pPr>
             <a:r>
@@ -9411,7 +9505,7 @@
           <a:bodyPr wrap="square" lIns="0" tIns="0" rIns="0" bIns="0" rtlCol="0" anchor="ctr"/>
           <a:lstStyle/>
           <a:p>
-            <a:pPr indent="0" marL="0">
+            <a:pPr marL="0" indent="0">
               <a:buNone/>
             </a:pPr>
             <a:r>
@@ -9437,7 +9531,7 @@
         </p:nvSpPr>
         <p:spPr>
           <a:xfrm>
-            <a:off x="2011680" y="2651760"/>
+            <a:off x="2011680" y="2468880"/>
             <a:ext cx="6583680" cy="731520"/>
           </a:xfrm>
           <a:prstGeom prst="rect">
@@ -9450,7 +9544,7 @@
           <a:bodyPr wrap="square" lIns="0" tIns="0" rIns="0" bIns="0" rtlCol="0" anchor="ctr"/>
           <a:lstStyle/>
           <a:p>
-            <a:pPr indent="0" marL="0">
+            <a:pPr marL="0" indent="0">
               <a:buNone/>
             </a:pPr>
             <a:r>
@@ -9489,7 +9583,7 @@
           <a:bodyPr wrap="square" lIns="0" tIns="0" rIns="0" bIns="0" rtlCol="0" anchor="ctr"/>
           <a:lstStyle/>
           <a:p>
-            <a:pPr indent="0" marL="0">
+            <a:pPr marL="0" indent="0">
               <a:buNone/>
             </a:pPr>
             <a:r>
@@ -9515,7 +9609,7 @@
         </p:nvSpPr>
         <p:spPr>
           <a:xfrm>
-            <a:off x="2011680" y="3657600"/>
+            <a:off x="2011680" y="3474720"/>
             <a:ext cx="6583680" cy="731520"/>
           </a:xfrm>
           <a:prstGeom prst="rect">
@@ -9528,7 +9622,7 @@
           <a:bodyPr wrap="square" lIns="0" tIns="0" rIns="0" bIns="0" rtlCol="0" anchor="ctr"/>
           <a:lstStyle/>
           <a:p>
-            <a:pPr indent="0" marL="0">
+            <a:pPr marL="0" indent="0">
               <a:buNone/>
             </a:pPr>
             <a:r>
@@ -9567,11 +9661,11 @@
           <a:bodyPr wrap="square" lIns="0" tIns="0" rIns="0" bIns="0" rtlCol="0" anchor="ctr"/>
           <a:lstStyle/>
           <a:p>
-            <a:pPr indent="0" marL="0">
-              <a:buNone/>
-            </a:pPr>
-            <a:r>
-              <a:rPr lang="en-US" sz="800" i="1" dirty="0">
+            <a:pPr marL="0" indent="0">
+              <a:buNone/>
+            </a:pPr>
+            <a:r>
+              <a:rPr lang="en-US" sz="1000" i="1" dirty="0">
                 <a:solidFill>
                   <a:srgbClr val="028090"/>
                 </a:solidFill>
@@ -9579,9 +9673,9 @@
                 <a:ea typeface="Calibri" pitchFamily="34" charset="-122"/>
                 <a:cs typeface="Calibri" pitchFamily="34" charset="-120"/>
               </a:rPr>
-              <a:t>Let's book a half-day workshop.</a:t>
-            </a:r>
-            <a:endParaRPr lang="en-US" sz="800" dirty="0"/>
+              <a:t>Let's book a half-day onsite workshop.</a:t>
+            </a:r>
+            <a:endParaRPr lang="en-US" sz="1000" dirty="0"/>
           </a:p>
         </p:txBody>
       </p:sp>
@@ -9606,7 +9700,7 @@
           <a:bodyPr wrap="square" lIns="0" tIns="0" rIns="0" bIns="0" rtlCol="0" anchor="ctr"/>
           <a:lstStyle/>
           <a:p>
-            <a:pPr algn="r" indent="0" marL="0">
+            <a:pPr marL="0" indent="0" algn="r">
               <a:buNone/>
             </a:pPr>
             <a:r>
@@ -9640,6 +9734,7 @@
         <a:solidFill>
           <a:srgbClr val="F7F8FA"/>
         </a:solidFill>
+        <a:effectLst/>
       </p:bgPr>
     </p:bg>
     <p:spTree>
@@ -9677,7 +9772,7 @@
           <a:bodyPr wrap="square" lIns="0" tIns="0" rIns="0" bIns="0" rtlCol="0" anchor="ctr"/>
           <a:lstStyle/>
           <a:p>
-            <a:pPr indent="0" marL="0">
+            <a:pPr marL="0" indent="0">
               <a:buNone/>
             </a:pPr>
             <a:r>
@@ -9716,7 +9811,7 @@
           <a:bodyPr wrap="square" lIns="0" tIns="0" rIns="0" bIns="0" rtlCol="0" anchor="ctr"/>
           <a:lstStyle/>
           <a:p>
-            <a:pPr indent="0" marL="0">
+            <a:pPr marL="0" indent="0">
               <a:buNone/>
             </a:pPr>
             <a:r>
@@ -9755,7 +9850,7 @@
           <a:bodyPr wrap="square" lIns="0" tIns="0" rIns="0" bIns="0" rtlCol="0" anchor="ctr"/>
           <a:lstStyle/>
           <a:p>
-            <a:pPr indent="0" marL="0">
+            <a:pPr marL="0" indent="0">
               <a:buNone/>
             </a:pPr>
             <a:r>
@@ -9794,7 +9889,7 @@
           <a:bodyPr wrap="square" lIns="0" tIns="0" rIns="0" bIns="0" rtlCol="0" anchor="ctr"/>
           <a:lstStyle/>
           <a:p>
-            <a:pPr indent="0" marL="0">
+            <a:pPr marL="0" indent="0">
               <a:buNone/>
             </a:pPr>
             <a:r>
@@ -9831,6 +9926,13 @@
           </a:solidFill>
           <a:ln/>
         </p:spPr>
+        <p:txBody>
+          <a:bodyPr/>
+          <a:lstStyle/>
+          <a:p>
+            <a:endParaRPr lang="en-US"/>
+          </a:p>
+        </p:txBody>
       </p:sp>
       <p:sp>
         <p:nvSpPr>
@@ -9853,7 +9955,7 @@
           <a:bodyPr wrap="square" lIns="0" tIns="0" rIns="0" bIns="0" rtlCol="0" anchor="ctr"/>
           <a:lstStyle/>
           <a:p>
-            <a:pPr indent="0" marL="0">
+            <a:pPr marL="0" indent="0">
               <a:buNone/>
             </a:pPr>
             <a:r>
@@ -9890,6 +9992,13 @@
           </a:solidFill>
           <a:ln/>
         </p:spPr>
+        <p:txBody>
+          <a:bodyPr/>
+          <a:lstStyle/>
+          <a:p>
+            <a:endParaRPr lang="en-US"/>
+          </a:p>
+        </p:txBody>
       </p:sp>
       <p:sp>
         <p:nvSpPr>
@@ -9912,7 +10021,7 @@
           <a:bodyPr wrap="square" lIns="0" tIns="0" rIns="0" bIns="0" rtlCol="0" anchor="ctr"/>
           <a:lstStyle/>
           <a:p>
-            <a:pPr indent="0" marL="0">
+            <a:pPr marL="0" indent="0">
               <a:buNone/>
             </a:pPr>
             <a:r>
@@ -9954,6 +10063,13 @@
             <a:prstDash val="solid"/>
           </a:ln>
         </p:spPr>
+        <p:txBody>
+          <a:bodyPr/>
+          <a:lstStyle/>
+          <a:p>
+            <a:endParaRPr lang="en-US"/>
+          </a:p>
+        </p:txBody>
       </p:sp>
       <p:sp>
         <p:nvSpPr>
@@ -9976,7 +10092,7 @@
           <a:bodyPr wrap="square" lIns="0" tIns="0" rIns="0" bIns="0" rtlCol="0" anchor="ctr"/>
           <a:lstStyle/>
           <a:p>
-            <a:pPr indent="0" marL="0">
+            <a:pPr marL="0" indent="0">
               <a:buNone/>
             </a:pPr>
             <a:r>
@@ -10018,6 +10134,13 @@
             <a:prstDash val="solid"/>
           </a:ln>
         </p:spPr>
+        <p:txBody>
+          <a:bodyPr/>
+          <a:lstStyle/>
+          <a:p>
+            <a:endParaRPr lang="en-US"/>
+          </a:p>
+        </p:txBody>
       </p:sp>
       <p:sp>
         <p:nvSpPr>
@@ -10040,7 +10163,7 @@
           <a:bodyPr wrap="square" lIns="0" tIns="0" rIns="0" bIns="0" rtlCol="0" anchor="ctr"/>
           <a:lstStyle/>
           <a:p>
-            <a:pPr indent="0" marL="0">
+            <a:pPr marL="0" indent="0">
               <a:buNone/>
             </a:pPr>
             <a:r>
@@ -10079,7 +10202,7 @@
           <a:bodyPr wrap="square" lIns="0" tIns="0" rIns="0" bIns="0" rtlCol="0" anchor="ctr"/>
           <a:lstStyle/>
           <a:p>
-            <a:pPr indent="0" marL="0">
+            <a:pPr marL="0" indent="0">
               <a:buNone/>
             </a:pPr>
             <a:r>
@@ -10118,7 +10241,7 @@
           <a:bodyPr wrap="square" lIns="0" tIns="0" rIns="0" bIns="0" rtlCol="0" anchor="ctr"/>
           <a:lstStyle/>
           <a:p>
-            <a:pPr indent="0" marL="0">
+            <a:pPr marL="0" indent="0">
               <a:buNone/>
             </a:pPr>
             <a:r>
@@ -10157,7 +10280,7 @@
           <a:bodyPr wrap="square" lIns="0" tIns="0" rIns="0" bIns="0" rtlCol="0" anchor="ctr"/>
           <a:lstStyle/>
           <a:p>
-            <a:pPr indent="0" marL="0">
+            <a:pPr marL="0" indent="0">
               <a:buNone/>
             </a:pPr>
             <a:r>
@@ -10196,7 +10319,7 @@
           <a:bodyPr wrap="square" lIns="0" tIns="0" rIns="0" bIns="0" rtlCol="0" anchor="ctr"/>
           <a:lstStyle/>
           <a:p>
-            <a:pPr indent="0" marL="0">
+            <a:pPr marL="0" indent="0">
               <a:buNone/>
             </a:pPr>
             <a:r>
@@ -10235,7 +10358,7 @@
           <a:bodyPr wrap="square" lIns="0" tIns="0" rIns="0" bIns="0" rtlCol="0" anchor="ctr"/>
           <a:lstStyle/>
           <a:p>
-            <a:pPr indent="0" marL="0">
+            <a:pPr marL="0" indent="0">
               <a:buNone/>
             </a:pPr>
             <a:r>
@@ -10274,7 +10397,7 @@
           <a:bodyPr wrap="square" lIns="0" tIns="0" rIns="0" bIns="0" rtlCol="0" anchor="ctr"/>
           <a:lstStyle/>
           <a:p>
-            <a:pPr indent="0" marL="0">
+            <a:pPr marL="0" indent="0">
               <a:buNone/>
             </a:pPr>
             <a:r>
@@ -10313,7 +10436,7 @@
           <a:bodyPr wrap="square" lIns="0" tIns="0" rIns="0" bIns="0" rtlCol="0" anchor="ctr"/>
           <a:lstStyle/>
           <a:p>
-            <a:pPr indent="0" marL="0">
+            <a:pPr marL="0" indent="0">
               <a:buNone/>
             </a:pPr>
             <a:r>
@@ -10352,7 +10475,7 @@
           <a:bodyPr wrap="square" lIns="0" tIns="0" rIns="0" bIns="0" rtlCol="0" anchor="ctr"/>
           <a:lstStyle/>
           <a:p>
-            <a:pPr indent="0" marL="0">
+            <a:pPr marL="0" indent="0">
               <a:buNone/>
             </a:pPr>
             <a:r>
@@ -10391,7 +10514,7 @@
           <a:bodyPr wrap="square" lIns="0" tIns="0" rIns="0" bIns="0" rtlCol="0" anchor="ctr"/>
           <a:lstStyle/>
           <a:p>
-            <a:pPr indent="0" marL="0">
+            <a:pPr marL="0" indent="0">
               <a:buNone/>
             </a:pPr>
             <a:r>
@@ -10430,7 +10553,7 @@
           <a:bodyPr wrap="square" lIns="0" tIns="0" rIns="0" bIns="0" rtlCol="0" anchor="ctr"/>
           <a:lstStyle/>
           <a:p>
-            <a:pPr indent="0" marL="0">
+            <a:pPr marL="0" indent="0">
               <a:buNone/>
             </a:pPr>
             <a:r>
@@ -10469,7 +10592,7 @@
           <a:bodyPr wrap="square" lIns="0" tIns="0" rIns="0" bIns="0" rtlCol="0" anchor="ctr"/>
           <a:lstStyle/>
           <a:p>
-            <a:pPr indent="0" marL="0">
+            <a:pPr marL="0" indent="0">
               <a:buNone/>
             </a:pPr>
             <a:r>
@@ -10508,7 +10631,7 @@
           <a:bodyPr wrap="square" lIns="0" tIns="0" rIns="0" bIns="0" rtlCol="0" anchor="ctr"/>
           <a:lstStyle/>
           <a:p>
-            <a:pPr indent="0" marL="0">
+            <a:pPr marL="0" indent="0">
               <a:buNone/>
             </a:pPr>
             <a:r>
@@ -10547,7 +10670,7 @@
           <a:bodyPr wrap="square" lIns="0" tIns="0" rIns="0" bIns="0" rtlCol="0" anchor="ctr"/>
           <a:lstStyle/>
           <a:p>
-            <a:pPr indent="0" marL="0">
+            <a:pPr marL="0" indent="0">
               <a:buNone/>
             </a:pPr>
             <a:r>
@@ -10586,7 +10709,7 @@
           <a:bodyPr wrap="square" lIns="0" tIns="0" rIns="0" bIns="0" rtlCol="0" anchor="ctr"/>
           <a:lstStyle/>
           <a:p>
-            <a:pPr indent="0" marL="0">
+            <a:pPr marL="0" indent="0">
               <a:buNone/>
             </a:pPr>
             <a:r>
@@ -10625,7 +10748,7 @@
           <a:bodyPr wrap="square" lIns="0" tIns="0" rIns="0" bIns="0" rtlCol="0" anchor="ctr"/>
           <a:lstStyle/>
           <a:p>
-            <a:pPr algn="r" indent="0" marL="0">
+            <a:pPr marL="0" indent="0" algn="r">
               <a:buNone/>
             </a:pPr>
             <a:r>
@@ -10659,6 +10782,7 @@
         <a:solidFill>
           <a:srgbClr val="F7F8FA"/>
         </a:solidFill>
+        <a:effectLst/>
       </p:bgPr>
     </p:bg>
     <p:spTree>
@@ -10696,7 +10820,7 @@
           <a:bodyPr wrap="square" lIns="0" tIns="0" rIns="0" bIns="0" rtlCol="0" anchor="ctr"/>
           <a:lstStyle/>
           <a:p>
-            <a:pPr indent="0" marL="0">
+            <a:pPr marL="0" indent="0">
               <a:buNone/>
             </a:pPr>
             <a:r>
@@ -10735,7 +10859,7 @@
           <a:bodyPr wrap="square" lIns="0" tIns="0" rIns="0" bIns="0" rtlCol="0" anchor="ctr"/>
           <a:lstStyle/>
           <a:p>
-            <a:pPr indent="0" marL="0">
+            <a:pPr marL="0" indent="0">
               <a:buNone/>
             </a:pPr>
             <a:r>
@@ -10761,7 +10885,7 @@
         </p:nvSpPr>
         <p:spPr>
           <a:xfrm>
-            <a:off x="548640" y="1280160"/>
+            <a:off x="548640" y="1394460"/>
             <a:ext cx="2926080" cy="228600"/>
           </a:xfrm>
           <a:prstGeom prst="rect">
@@ -10774,7 +10898,7 @@
           <a:bodyPr wrap="square" lIns="0" tIns="0" rIns="0" bIns="0" rtlCol="0" anchor="ctr"/>
           <a:lstStyle/>
           <a:p>
-            <a:pPr indent="0" marL="0">
+            <a:pPr marL="0" indent="0">
               <a:buNone/>
             </a:pPr>
             <a:r>
@@ -10813,7 +10937,7 @@
           <a:bodyPr wrap="square" lIns="0" tIns="0" rIns="0" bIns="0" rtlCol="0" anchor="ctr"/>
           <a:lstStyle/>
           <a:p>
-            <a:pPr indent="0" marL="0">
+            <a:pPr marL="0" indent="0">
               <a:buNone/>
             </a:pPr>
             <a:r>
@@ -10839,7 +10963,7 @@
         </p:nvSpPr>
         <p:spPr>
           <a:xfrm>
-            <a:off x="548640" y="1828800"/>
+            <a:off x="548640" y="1917519"/>
             <a:ext cx="2926080" cy="228600"/>
           </a:xfrm>
           <a:prstGeom prst="rect">
@@ -10852,7 +10976,7 @@
           <a:bodyPr wrap="square" lIns="0" tIns="0" rIns="0" bIns="0" rtlCol="0" anchor="ctr"/>
           <a:lstStyle/>
           <a:p>
-            <a:pPr indent="0" marL="0">
+            <a:pPr marL="0" indent="0">
               <a:buNone/>
             </a:pPr>
             <a:r>
@@ -10891,7 +11015,7 @@
           <a:bodyPr wrap="square" lIns="0" tIns="0" rIns="0" bIns="0" rtlCol="0" anchor="ctr"/>
           <a:lstStyle/>
           <a:p>
-            <a:pPr indent="0" marL="0">
+            <a:pPr marL="0" indent="0">
               <a:buNone/>
             </a:pPr>
             <a:r>
@@ -10917,7 +11041,7 @@
         </p:nvSpPr>
         <p:spPr>
           <a:xfrm>
-            <a:off x="548640" y="2377440"/>
+            <a:off x="548640" y="2457450"/>
             <a:ext cx="2926080" cy="228600"/>
           </a:xfrm>
           <a:prstGeom prst="rect">
@@ -10930,7 +11054,7 @@
           <a:bodyPr wrap="square" lIns="0" tIns="0" rIns="0" bIns="0" rtlCol="0" anchor="ctr"/>
           <a:lstStyle/>
           <a:p>
-            <a:pPr indent="0" marL="0">
+            <a:pPr marL="0" indent="0">
               <a:buNone/>
             </a:pPr>
             <a:r>
@@ -10969,7 +11093,7 @@
           <a:bodyPr wrap="square" lIns="0" tIns="0" rIns="0" bIns="0" rtlCol="0" anchor="ctr"/>
           <a:lstStyle/>
           <a:p>
-            <a:pPr indent="0" marL="0">
+            <a:pPr marL="0" indent="0">
               <a:buNone/>
             </a:pPr>
             <a:r>
@@ -10995,7 +11119,7 @@
         </p:nvSpPr>
         <p:spPr>
           <a:xfrm>
-            <a:off x="548640" y="2926080"/>
+            <a:off x="548640" y="3014799"/>
             <a:ext cx="2926080" cy="228600"/>
           </a:xfrm>
           <a:prstGeom prst="rect">
@@ -11008,7 +11132,7 @@
           <a:bodyPr wrap="square" lIns="0" tIns="0" rIns="0" bIns="0" rtlCol="0" anchor="ctr"/>
           <a:lstStyle/>
           <a:p>
-            <a:pPr indent="0" marL="0">
+            <a:pPr marL="0" indent="0">
               <a:buNone/>
             </a:pPr>
             <a:r>
@@ -11047,7 +11171,7 @@
           <a:bodyPr wrap="square" lIns="0" tIns="0" rIns="0" bIns="0" rtlCol="0" anchor="ctr"/>
           <a:lstStyle/>
           <a:p>
-            <a:pPr indent="0" marL="0">
+            <a:pPr marL="0" indent="0">
               <a:buNone/>
             </a:pPr>
             <a:r>
@@ -11073,7 +11197,7 @@
         </p:nvSpPr>
         <p:spPr>
           <a:xfrm>
-            <a:off x="548640" y="3474720"/>
+            <a:off x="548640" y="3572148"/>
             <a:ext cx="2926080" cy="228600"/>
           </a:xfrm>
           <a:prstGeom prst="rect">
@@ -11086,7 +11210,7 @@
           <a:bodyPr wrap="square" lIns="0" tIns="0" rIns="0" bIns="0" rtlCol="0" anchor="ctr"/>
           <a:lstStyle/>
           <a:p>
-            <a:pPr indent="0" marL="0">
+            <a:pPr marL="0" indent="0">
               <a:buNone/>
             </a:pPr>
             <a:r>
@@ -11125,7 +11249,7 @@
           <a:bodyPr wrap="square" lIns="0" tIns="0" rIns="0" bIns="0" rtlCol="0" anchor="ctr"/>
           <a:lstStyle/>
           <a:p>
-            <a:pPr indent="0" marL="0">
+            <a:pPr marL="0" indent="0">
               <a:buNone/>
             </a:pPr>
             <a:r>
@@ -11151,7 +11275,7 @@
         </p:nvSpPr>
         <p:spPr>
           <a:xfrm>
-            <a:off x="548640" y="4023360"/>
+            <a:off x="548640" y="4072074"/>
             <a:ext cx="2926080" cy="228600"/>
           </a:xfrm>
           <a:prstGeom prst="rect">
@@ -11164,7 +11288,7 @@
           <a:bodyPr wrap="square" lIns="0" tIns="0" rIns="0" bIns="0" rtlCol="0" anchor="ctr"/>
           <a:lstStyle/>
           <a:p>
-            <a:pPr indent="0" marL="0">
+            <a:pPr marL="0" indent="0">
               <a:buNone/>
             </a:pPr>
             <a:r>
@@ -11203,7 +11327,7 @@
           <a:bodyPr wrap="square" lIns="0" tIns="0" rIns="0" bIns="0" rtlCol="0" anchor="ctr"/>
           <a:lstStyle/>
           <a:p>
-            <a:pPr indent="0" marL="0">
+            <a:pPr marL="0" indent="0">
               <a:buNone/>
             </a:pPr>
             <a:r>
@@ -11229,7 +11353,7 @@
         </p:nvSpPr>
         <p:spPr>
           <a:xfrm>
-            <a:off x="548640" y="4800600"/>
+            <a:off x="548640" y="4751886"/>
             <a:ext cx="7315200" cy="274320"/>
           </a:xfrm>
           <a:prstGeom prst="rect">
@@ -11242,11 +11366,11 @@
           <a:bodyPr wrap="square" lIns="0" tIns="0" rIns="0" bIns="0" rtlCol="0" anchor="ctr"/>
           <a:lstStyle/>
           <a:p>
-            <a:pPr indent="0" marL="0">
-              <a:buNone/>
-            </a:pPr>
-            <a:r>
-              <a:rPr lang="en-US" sz="800" i="1" dirty="0">
+            <a:pPr marL="0" indent="0">
+              <a:buNone/>
+            </a:pPr>
+            <a:r>
+              <a:rPr lang="en-US" sz="1000" i="1" dirty="0">
                 <a:solidFill>
                   <a:srgbClr val="028090"/>
                 </a:solidFill>
@@ -11256,7 +11380,7 @@
               </a:rPr>
               <a:t>We'll walk through your actual cost data in the live demo.</a:t>
             </a:r>
-            <a:endParaRPr lang="en-US" sz="800" dirty="0"/>
+            <a:endParaRPr lang="en-US" sz="1000" dirty="0"/>
           </a:p>
         </p:txBody>
       </p:sp>
@@ -11281,7 +11405,7 @@
           <a:bodyPr wrap="square" lIns="0" tIns="0" rIns="0" bIns="0" rtlCol="0" anchor="ctr"/>
           <a:lstStyle/>
           <a:p>
-            <a:pPr algn="r" indent="0" marL="0">
+            <a:pPr marL="0" indent="0" algn="r">
               <a:buNone/>
             </a:pPr>
             <a:r>
@@ -11315,6 +11439,7 @@
         <a:solidFill>
           <a:srgbClr val="F7F8FA"/>
         </a:solidFill>
+        <a:effectLst/>
       </p:bgPr>
     </p:bg>
     <p:spTree>
@@ -11352,7 +11477,7 @@
           <a:bodyPr wrap="square" lIns="0" tIns="0" rIns="0" bIns="0" rtlCol="0" anchor="ctr"/>
           <a:lstStyle/>
           <a:p>
-            <a:pPr indent="0" marL="0">
+            <a:pPr marL="0" indent="0">
               <a:buNone/>
             </a:pPr>
             <a:r>
@@ -11389,6 +11514,13 @@
           </a:solidFill>
           <a:ln/>
         </p:spPr>
+        <p:txBody>
+          <a:bodyPr/>
+          <a:lstStyle/>
+          <a:p>
+            <a:endParaRPr lang="en-US"/>
+          </a:p>
+        </p:txBody>
       </p:sp>
       <p:sp>
         <p:nvSpPr>
@@ -11411,7 +11543,7 @@
           <a:bodyPr wrap="square" lIns="0" tIns="0" rIns="0" bIns="0" rtlCol="0" anchor="ctr"/>
           <a:lstStyle/>
           <a:p>
-            <a:pPr indent="0" marL="0">
+            <a:pPr marL="0" indent="0">
               <a:buNone/>
             </a:pPr>
             <a:r>
@@ -11448,6 +11580,13 @@
           </a:solidFill>
           <a:ln/>
         </p:spPr>
+        <p:txBody>
+          <a:bodyPr/>
+          <a:lstStyle/>
+          <a:p>
+            <a:endParaRPr lang="en-US"/>
+          </a:p>
+        </p:txBody>
       </p:sp>
       <p:sp>
         <p:nvSpPr>
@@ -11470,7 +11609,7 @@
           <a:bodyPr wrap="square" lIns="0" tIns="0" rIns="0" bIns="0" rtlCol="0" anchor="ctr"/>
           <a:lstStyle/>
           <a:p>
-            <a:pPr indent="0" marL="0">
+            <a:pPr marL="0" indent="0">
               <a:buNone/>
             </a:pPr>
             <a:r>
@@ -11512,6 +11651,13 @@
             <a:prstDash val="solid"/>
           </a:ln>
         </p:spPr>
+        <p:txBody>
+          <a:bodyPr/>
+          <a:lstStyle/>
+          <a:p>
+            <a:endParaRPr lang="en-US"/>
+          </a:p>
+        </p:txBody>
       </p:sp>
       <p:sp>
         <p:nvSpPr>
@@ -11534,7 +11680,7 @@
           <a:bodyPr wrap="square" lIns="0" tIns="0" rIns="0" bIns="0" rtlCol="0" anchor="ctr"/>
           <a:lstStyle/>
           <a:p>
-            <a:pPr indent="0" marL="0">
+            <a:pPr marL="0" indent="0">
               <a:buNone/>
             </a:pPr>
             <a:r>
@@ -11576,6 +11722,13 @@
             <a:prstDash val="solid"/>
           </a:ln>
         </p:spPr>
+        <p:txBody>
+          <a:bodyPr/>
+          <a:lstStyle/>
+          <a:p>
+            <a:endParaRPr lang="en-US"/>
+          </a:p>
+        </p:txBody>
       </p:sp>
       <p:sp>
         <p:nvSpPr>
@@ -11598,7 +11751,7 @@
           <a:bodyPr wrap="square" lIns="0" tIns="0" rIns="0" bIns="0" rtlCol="0" anchor="ctr"/>
           <a:lstStyle/>
           <a:p>
-            <a:pPr indent="0" marL="0">
+            <a:pPr marL="0" indent="0">
               <a:buNone/>
             </a:pPr>
             <a:r>
@@ -11640,6 +11793,13 @@
             <a:prstDash val="solid"/>
           </a:ln>
         </p:spPr>
+        <p:txBody>
+          <a:bodyPr/>
+          <a:lstStyle/>
+          <a:p>
+            <a:endParaRPr lang="en-US"/>
+          </a:p>
+        </p:txBody>
       </p:sp>
       <p:sp>
         <p:nvSpPr>
@@ -11662,7 +11822,7 @@
           <a:bodyPr wrap="square" lIns="0" tIns="0" rIns="0" bIns="0" rtlCol="0" anchor="ctr"/>
           <a:lstStyle/>
           <a:p>
-            <a:pPr indent="0" marL="0">
+            <a:pPr marL="0" indent="0">
               <a:buNone/>
             </a:pPr>
             <a:r>
@@ -11704,6 +11864,13 @@
             <a:prstDash val="solid"/>
           </a:ln>
         </p:spPr>
+        <p:txBody>
+          <a:bodyPr/>
+          <a:lstStyle/>
+          <a:p>
+            <a:endParaRPr lang="en-US"/>
+          </a:p>
+        </p:txBody>
       </p:sp>
       <p:sp>
         <p:nvSpPr>
@@ -11726,7 +11893,7 @@
           <a:bodyPr wrap="square" lIns="0" tIns="0" rIns="0" bIns="0" rtlCol="0" anchor="ctr"/>
           <a:lstStyle/>
           <a:p>
-            <a:pPr indent="0" marL="0">
+            <a:pPr marL="0" indent="0">
               <a:buNone/>
             </a:pPr>
             <a:r>
@@ -11768,6 +11935,13 @@
             <a:prstDash val="solid"/>
           </a:ln>
         </p:spPr>
+        <p:txBody>
+          <a:bodyPr/>
+          <a:lstStyle/>
+          <a:p>
+            <a:endParaRPr lang="en-US"/>
+          </a:p>
+        </p:txBody>
       </p:sp>
       <p:sp>
         <p:nvSpPr>
@@ -11790,7 +11964,7 @@
           <a:bodyPr wrap="square" lIns="0" tIns="0" rIns="0" bIns="0" rtlCol="0" anchor="ctr"/>
           <a:lstStyle/>
           <a:p>
-            <a:pPr indent="0" marL="0">
+            <a:pPr marL="0" indent="0">
               <a:buNone/>
             </a:pPr>
             <a:r>
@@ -11832,6 +12006,13 @@
             <a:prstDash val="solid"/>
           </a:ln>
         </p:spPr>
+        <p:txBody>
+          <a:bodyPr/>
+          <a:lstStyle/>
+          <a:p>
+            <a:endParaRPr lang="en-US"/>
+          </a:p>
+        </p:txBody>
       </p:sp>
       <p:sp>
         <p:nvSpPr>
@@ -11854,7 +12035,7 @@
           <a:bodyPr wrap="square" lIns="0" tIns="0" rIns="0" bIns="0" rtlCol="0" anchor="ctr"/>
           <a:lstStyle/>
           <a:p>
-            <a:pPr indent="0" marL="0">
+            <a:pPr marL="0" indent="0">
               <a:buNone/>
             </a:pPr>
             <a:r>
@@ -11896,6 +12077,13 @@
             <a:prstDash val="solid"/>
           </a:ln>
         </p:spPr>
+        <p:txBody>
+          <a:bodyPr/>
+          <a:lstStyle/>
+          <a:p>
+            <a:endParaRPr lang="en-US"/>
+          </a:p>
+        </p:txBody>
       </p:sp>
       <p:sp>
         <p:nvSpPr>
@@ -11918,7 +12106,7 @@
           <a:bodyPr wrap="square" lIns="0" tIns="0" rIns="0" bIns="0" rtlCol="0" anchor="ctr"/>
           <a:lstStyle/>
           <a:p>
-            <a:pPr indent="0" marL="0">
+            <a:pPr marL="0" indent="0">
               <a:buNone/>
             </a:pPr>
             <a:r>
@@ -11960,6 +12148,13 @@
             <a:prstDash val="solid"/>
           </a:ln>
         </p:spPr>
+        <p:txBody>
+          <a:bodyPr/>
+          <a:lstStyle/>
+          <a:p>
+            <a:endParaRPr lang="en-US"/>
+          </a:p>
+        </p:txBody>
       </p:sp>
       <p:sp>
         <p:nvSpPr>
@@ -11982,7 +12177,7 @@
           <a:bodyPr wrap="square" lIns="0" tIns="0" rIns="0" bIns="0" rtlCol="0" anchor="ctr"/>
           <a:lstStyle/>
           <a:p>
-            <a:pPr indent="0" marL="0">
+            <a:pPr marL="0" indent="0">
               <a:buNone/>
             </a:pPr>
             <a:r>
@@ -12024,6 +12219,13 @@
             <a:prstDash val="solid"/>
           </a:ln>
         </p:spPr>
+        <p:txBody>
+          <a:bodyPr/>
+          <a:lstStyle/>
+          <a:p>
+            <a:endParaRPr lang="en-US"/>
+          </a:p>
+        </p:txBody>
       </p:sp>
       <p:sp>
         <p:nvSpPr>
@@ -12046,7 +12248,7 @@
           <a:bodyPr wrap="square" lIns="0" tIns="0" rIns="0" bIns="0" rtlCol="0" anchor="ctr"/>
           <a:lstStyle/>
           <a:p>
-            <a:pPr indent="0" marL="0">
+            <a:pPr marL="0" indent="0">
               <a:buNone/>
             </a:pPr>
             <a:r>
@@ -12088,6 +12290,13 @@
             <a:prstDash val="solid"/>
           </a:ln>
         </p:spPr>
+        <p:txBody>
+          <a:bodyPr/>
+          <a:lstStyle/>
+          <a:p>
+            <a:endParaRPr lang="en-US"/>
+          </a:p>
+        </p:txBody>
       </p:sp>
       <p:sp>
         <p:nvSpPr>
@@ -12110,7 +12319,7 @@
           <a:bodyPr wrap="square" lIns="0" tIns="0" rIns="0" bIns="0" rtlCol="0" anchor="ctr"/>
           <a:lstStyle/>
           <a:p>
-            <a:pPr indent="0" marL="0">
+            <a:pPr marL="0" indent="0">
               <a:buNone/>
             </a:pPr>
             <a:r>
@@ -12152,6 +12361,13 @@
             <a:prstDash val="solid"/>
           </a:ln>
         </p:spPr>
+        <p:txBody>
+          <a:bodyPr/>
+          <a:lstStyle/>
+          <a:p>
+            <a:endParaRPr lang="en-US"/>
+          </a:p>
+        </p:txBody>
       </p:sp>
       <p:sp>
         <p:nvSpPr>
@@ -12174,7 +12390,7 @@
           <a:bodyPr wrap="square" lIns="0" tIns="0" rIns="0" bIns="0" rtlCol="0" anchor="ctr"/>
           <a:lstStyle/>
           <a:p>
-            <a:pPr indent="0" marL="0">
+            <a:pPr marL="0" indent="0">
               <a:buNone/>
             </a:pPr>
             <a:r>
@@ -12216,6 +12432,13 @@
             <a:prstDash val="solid"/>
           </a:ln>
         </p:spPr>
+        <p:txBody>
+          <a:bodyPr/>
+          <a:lstStyle/>
+          <a:p>
+            <a:endParaRPr lang="en-US"/>
+          </a:p>
+        </p:txBody>
       </p:sp>
       <p:sp>
         <p:nvSpPr>
@@ -12238,7 +12461,7 @@
           <a:bodyPr wrap="square" lIns="0" tIns="0" rIns="0" bIns="0" rtlCol="0" anchor="ctr"/>
           <a:lstStyle/>
           <a:p>
-            <a:pPr indent="0" marL="0">
+            <a:pPr marL="0" indent="0">
               <a:buNone/>
             </a:pPr>
             <a:r>
@@ -12280,6 +12503,13 @@
             <a:prstDash val="solid"/>
           </a:ln>
         </p:spPr>
+        <p:txBody>
+          <a:bodyPr/>
+          <a:lstStyle/>
+          <a:p>
+            <a:endParaRPr lang="en-US"/>
+          </a:p>
+        </p:txBody>
       </p:sp>
       <p:sp>
         <p:nvSpPr>
@@ -12302,7 +12532,7 @@
           <a:bodyPr wrap="square" lIns="0" tIns="0" rIns="0" bIns="0" rtlCol="0" anchor="ctr"/>
           <a:lstStyle/>
           <a:p>
-            <a:pPr indent="0" marL="0">
+            <a:pPr marL="0" indent="0">
               <a:buNone/>
             </a:pPr>
             <a:r>
@@ -12344,6 +12574,13 @@
             <a:prstDash val="solid"/>
           </a:ln>
         </p:spPr>
+        <p:txBody>
+          <a:bodyPr/>
+          <a:lstStyle/>
+          <a:p>
+            <a:endParaRPr lang="en-US"/>
+          </a:p>
+        </p:txBody>
       </p:sp>
       <p:sp>
         <p:nvSpPr>
@@ -12366,7 +12603,7 @@
           <a:bodyPr wrap="square" lIns="0" tIns="0" rIns="0" bIns="0" rtlCol="0" anchor="ctr"/>
           <a:lstStyle/>
           <a:p>
-            <a:pPr indent="0" marL="0">
+            <a:pPr marL="0" indent="0">
               <a:buNone/>
             </a:pPr>
             <a:r>
@@ -12392,7 +12629,7 @@
         </p:nvSpPr>
         <p:spPr>
           <a:xfrm>
-            <a:off x="548640" y="4800600"/>
+            <a:off x="548640" y="4665617"/>
             <a:ext cx="7315200" cy="274320"/>
           </a:xfrm>
           <a:prstGeom prst="rect">
@@ -12405,11 +12642,11 @@
           <a:bodyPr wrap="square" lIns="0" tIns="0" rIns="0" bIns="0" rtlCol="0" anchor="ctr"/>
           <a:lstStyle/>
           <a:p>
-            <a:pPr indent="0" marL="0">
-              <a:buNone/>
-            </a:pPr>
-            <a:r>
-              <a:rPr lang="en-US" sz="800" i="1" dirty="0">
+            <a:pPr marL="0" indent="0">
+              <a:buNone/>
+            </a:pPr>
+            <a:r>
+              <a:rPr lang="en-US" sz="1000" i="1" dirty="0">
                 <a:solidFill>
                   <a:srgbClr val="028090"/>
                 </a:solidFill>
@@ -12419,7 +12656,7 @@
               </a:rPr>
               <a:t>We'll walk through your actual cost data in the live demo.</a:t>
             </a:r>
-            <a:endParaRPr lang="en-US" sz="800" dirty="0"/>
+            <a:endParaRPr lang="en-US" sz="1000" dirty="0"/>
           </a:p>
         </p:txBody>
       </p:sp>
@@ -12444,7 +12681,7 @@
           <a:bodyPr wrap="square" lIns="0" tIns="0" rIns="0" bIns="0" rtlCol="0" anchor="ctr"/>
           <a:lstStyle/>
           <a:p>
-            <a:pPr algn="r" indent="0" marL="0">
+            <a:pPr marL="0" indent="0" algn="r">
               <a:buNone/>
             </a:pPr>
             <a:r>
@@ -12478,6 +12715,7 @@
         <a:solidFill>
           <a:srgbClr val="F7F8FA"/>
         </a:solidFill>
+        <a:effectLst/>
       </p:bgPr>
     </p:bg>
     <p:spTree>
@@ -12515,7 +12753,7 @@
           <a:bodyPr wrap="square" lIns="0" tIns="0" rIns="0" bIns="0" rtlCol="0" anchor="ctr"/>
           <a:lstStyle/>
           <a:p>
-            <a:pPr indent="0" marL="0">
+            <a:pPr marL="0" indent="0">
               <a:buNone/>
             </a:pPr>
             <a:r>
@@ -12554,7 +12792,7 @@
           <a:bodyPr wrap="square" lIns="0" tIns="0" rIns="0" bIns="0" rtlCol="0" anchor="ctr"/>
           <a:lstStyle/>
           <a:p>
-            <a:pPr indent="0" marL="0">
+            <a:pPr marL="0" indent="0">
               <a:buNone/>
             </a:pPr>
             <a:r>
@@ -12580,7 +12818,7 @@
         </p:nvSpPr>
         <p:spPr>
           <a:xfrm>
-            <a:off x="548640" y="1417320"/>
+            <a:off x="548640" y="1485900"/>
             <a:ext cx="2286000" cy="228600"/>
           </a:xfrm>
           <a:prstGeom prst="rect">
@@ -12593,7 +12831,7 @@
           <a:bodyPr wrap="square" lIns="0" tIns="0" rIns="0" bIns="0" rtlCol="0" anchor="ctr"/>
           <a:lstStyle/>
           <a:p>
-            <a:pPr indent="0" marL="0">
+            <a:pPr marL="0" indent="0">
               <a:buNone/>
             </a:pPr>
             <a:r>
@@ -12632,7 +12870,7 @@
           <a:bodyPr wrap="square" lIns="0" tIns="0" rIns="0" bIns="0" rtlCol="0" anchor="ctr"/>
           <a:lstStyle/>
           <a:p>
-            <a:pPr indent="0" marL="0">
+            <a:pPr marL="0" indent="0">
               <a:buNone/>
             </a:pPr>
             <a:r>
@@ -12658,7 +12896,7 @@
         </p:nvSpPr>
         <p:spPr>
           <a:xfrm>
-            <a:off x="548640" y="1920240"/>
+            <a:off x="548640" y="2011680"/>
             <a:ext cx="2286000" cy="228600"/>
           </a:xfrm>
           <a:prstGeom prst="rect">
@@ -12671,7 +12909,7 @@
           <a:bodyPr wrap="square" lIns="0" tIns="0" rIns="0" bIns="0" rtlCol="0" anchor="ctr"/>
           <a:lstStyle/>
           <a:p>
-            <a:pPr indent="0" marL="0">
+            <a:pPr marL="0" indent="0">
               <a:buNone/>
             </a:pPr>
             <a:r>
@@ -12710,7 +12948,7 @@
           <a:bodyPr wrap="square" lIns="0" tIns="0" rIns="0" bIns="0" rtlCol="0" anchor="ctr"/>
           <a:lstStyle/>
           <a:p>
-            <a:pPr indent="0" marL="0">
+            <a:pPr marL="0" indent="0">
               <a:buNone/>
             </a:pPr>
             <a:r>
@@ -12736,7 +12974,7 @@
         </p:nvSpPr>
         <p:spPr>
           <a:xfrm>
-            <a:off x="548640" y="2423160"/>
+            <a:off x="548640" y="2499360"/>
             <a:ext cx="2286000" cy="228600"/>
           </a:xfrm>
           <a:prstGeom prst="rect">
@@ -12749,7 +12987,7 @@
           <a:bodyPr wrap="square" lIns="0" tIns="0" rIns="0" bIns="0" rtlCol="0" anchor="ctr"/>
           <a:lstStyle/>
           <a:p>
-            <a:pPr indent="0" marL="0">
+            <a:pPr marL="0" indent="0">
               <a:buNone/>
             </a:pPr>
             <a:r>
@@ -12788,7 +13026,7 @@
           <a:bodyPr wrap="square" lIns="0" tIns="0" rIns="0" bIns="0" rtlCol="0" anchor="ctr"/>
           <a:lstStyle/>
           <a:p>
-            <a:pPr indent="0" marL="0">
+            <a:pPr marL="0" indent="0">
               <a:buNone/>
             </a:pPr>
             <a:r>
@@ -12814,7 +13052,7 @@
         </p:nvSpPr>
         <p:spPr>
           <a:xfrm>
-            <a:off x="548640" y="2926080"/>
+            <a:off x="548640" y="3012077"/>
             <a:ext cx="2286000" cy="228600"/>
           </a:xfrm>
           <a:prstGeom prst="rect">
@@ -12827,7 +13065,7 @@
           <a:bodyPr wrap="square" lIns="0" tIns="0" rIns="0" bIns="0" rtlCol="0" anchor="ctr"/>
           <a:lstStyle/>
           <a:p>
-            <a:pPr indent="0" marL="0">
+            <a:pPr marL="0" indent="0">
               <a:buNone/>
             </a:pPr>
             <a:r>
@@ -12866,7 +13104,7 @@
           <a:bodyPr wrap="square" lIns="0" tIns="0" rIns="0" bIns="0" rtlCol="0" anchor="ctr"/>
           <a:lstStyle/>
           <a:p>
-            <a:pPr indent="0" marL="0">
+            <a:pPr marL="0" indent="0">
               <a:buNone/>
             </a:pPr>
             <a:r>
@@ -12892,7 +13130,7 @@
         </p:nvSpPr>
         <p:spPr>
           <a:xfrm>
-            <a:off x="548640" y="3429000"/>
+            <a:off x="548640" y="3520440"/>
             <a:ext cx="2286000" cy="228600"/>
           </a:xfrm>
           <a:prstGeom prst="rect">
@@ -12905,7 +13143,7 @@
           <a:bodyPr wrap="square" lIns="0" tIns="0" rIns="0" bIns="0" rtlCol="0" anchor="ctr"/>
           <a:lstStyle/>
           <a:p>
-            <a:pPr indent="0" marL="0">
+            <a:pPr marL="0" indent="0">
               <a:buNone/>
             </a:pPr>
             <a:r>
@@ -12944,7 +13182,7 @@
           <a:bodyPr wrap="square" lIns="0" tIns="0" rIns="0" bIns="0" rtlCol="0" anchor="ctr"/>
           <a:lstStyle/>
           <a:p>
-            <a:pPr indent="0" marL="0">
+            <a:pPr marL="0" indent="0">
               <a:buNone/>
             </a:pPr>
             <a:r>
@@ -12970,7 +13208,7 @@
         </p:nvSpPr>
         <p:spPr>
           <a:xfrm>
-            <a:off x="548640" y="3931920"/>
+            <a:off x="548640" y="3985260"/>
             <a:ext cx="2286000" cy="228600"/>
           </a:xfrm>
           <a:prstGeom prst="rect">
@@ -12983,7 +13221,7 @@
           <a:bodyPr wrap="square" lIns="0" tIns="0" rIns="0" bIns="0" rtlCol="0" anchor="ctr"/>
           <a:lstStyle/>
           <a:p>
-            <a:pPr indent="0" marL="0">
+            <a:pPr marL="0" indent="0">
               <a:buNone/>
             </a:pPr>
             <a:r>
@@ -13022,7 +13260,7 @@
           <a:bodyPr wrap="square" lIns="0" tIns="0" rIns="0" bIns="0" rtlCol="0" anchor="ctr"/>
           <a:lstStyle/>
           <a:p>
-            <a:pPr indent="0" marL="0">
+            <a:pPr marL="0" indent="0">
               <a:buNone/>
             </a:pPr>
             <a:r>
@@ -13048,7 +13286,7 @@
         </p:nvSpPr>
         <p:spPr>
           <a:xfrm>
-            <a:off x="548640" y="4800600"/>
+            <a:off x="548640" y="4663440"/>
             <a:ext cx="7315200" cy="274320"/>
           </a:xfrm>
           <a:prstGeom prst="rect">
@@ -13061,11 +13299,8 @@
           <a:bodyPr wrap="square" lIns="0" tIns="0" rIns="0" bIns="0" rtlCol="0" anchor="ctr"/>
           <a:lstStyle/>
           <a:p>
-            <a:pPr indent="0" marL="0">
-              <a:buNone/>
-            </a:pPr>
-            <a:r>
-              <a:rPr lang="en-US" sz="800" i="1" dirty="0">
+            <a:r>
+              <a:rPr lang="en-US" sz="1000" i="1" dirty="0">
                 <a:solidFill>
                   <a:srgbClr val="028090"/>
                 </a:solidFill>
@@ -13073,9 +13308,9 @@
                 <a:ea typeface="Calibri" pitchFamily="34" charset="-122"/>
                 <a:cs typeface="Calibri" pitchFamily="34" charset="-120"/>
               </a:rPr>
-              <a:t>We'd like your input on how to name your workspaces.</a:t>
-            </a:r>
-            <a:endParaRPr lang="en-US" sz="800" dirty="0"/>
+              <a:t>We'd like your input on naming your workspaces.</a:t>
+            </a:r>
+            <a:endParaRPr lang="en-US" sz="1000" dirty="0"/>
           </a:p>
         </p:txBody>
       </p:sp>
@@ -13100,7 +13335,7 @@
           <a:bodyPr wrap="square" lIns="0" tIns="0" rIns="0" bIns="0" rtlCol="0" anchor="ctr"/>
           <a:lstStyle/>
           <a:p>
-            <a:pPr algn="r" indent="0" marL="0">
+            <a:pPr marL="0" indent="0" algn="r">
               <a:buNone/>
             </a:pPr>
             <a:r>
@@ -13134,6 +13369,7 @@
         <a:solidFill>
           <a:srgbClr val="F7F8FA"/>
         </a:solidFill>
+        <a:effectLst/>
       </p:bgPr>
     </p:bg>
     <p:spTree>
@@ -13171,7 +13407,7 @@
           <a:bodyPr wrap="square" lIns="0" tIns="0" rIns="0" bIns="0" rtlCol="0" anchor="ctr"/>
           <a:lstStyle/>
           <a:p>
-            <a:pPr indent="0" marL="0">
+            <a:pPr marL="0" indent="0">
               <a:buNone/>
             </a:pPr>
             <a:r>
@@ -13208,6 +13444,13 @@
           </a:solidFill>
           <a:ln/>
         </p:spPr>
+        <p:txBody>
+          <a:bodyPr/>
+          <a:lstStyle/>
+          <a:p>
+            <a:endParaRPr lang="en-US"/>
+          </a:p>
+        </p:txBody>
       </p:sp>
       <p:sp>
         <p:nvSpPr>
@@ -13230,7 +13473,7 @@
           <a:bodyPr wrap="square" lIns="0" tIns="0" rIns="0" bIns="0" rtlCol="0" anchor="ctr"/>
           <a:lstStyle/>
           <a:p>
-            <a:pPr indent="0" marL="0">
+            <a:pPr marL="0" indent="0">
               <a:buNone/>
             </a:pPr>
             <a:r>
@@ -13267,6 +13510,13 @@
           </a:solidFill>
           <a:ln/>
         </p:spPr>
+        <p:txBody>
+          <a:bodyPr/>
+          <a:lstStyle/>
+          <a:p>
+            <a:endParaRPr lang="en-US"/>
+          </a:p>
+        </p:txBody>
       </p:sp>
       <p:sp>
         <p:nvSpPr>
@@ -13289,7 +13539,7 @@
           <a:bodyPr wrap="square" lIns="0" tIns="0" rIns="0" bIns="0" rtlCol="0" anchor="ctr"/>
           <a:lstStyle/>
           <a:p>
-            <a:pPr indent="0" marL="0">
+            <a:pPr marL="0" indent="0">
               <a:buNone/>
             </a:pPr>
             <a:r>
@@ -13331,6 +13581,13 @@
             <a:prstDash val="solid"/>
           </a:ln>
         </p:spPr>
+        <p:txBody>
+          <a:bodyPr/>
+          <a:lstStyle/>
+          <a:p>
+            <a:endParaRPr lang="en-US"/>
+          </a:p>
+        </p:txBody>
       </p:sp>
       <p:sp>
         <p:nvSpPr>
@@ -13353,7 +13610,7 @@
           <a:bodyPr wrap="square" lIns="0" tIns="0" rIns="0" bIns="0" rtlCol="0" anchor="ctr"/>
           <a:lstStyle/>
           <a:p>
-            <a:pPr indent="0" marL="0">
+            <a:pPr marL="0" indent="0">
               <a:buNone/>
             </a:pPr>
             <a:r>
@@ -13395,6 +13652,13 @@
             <a:prstDash val="solid"/>
           </a:ln>
         </p:spPr>
+        <p:txBody>
+          <a:bodyPr/>
+          <a:lstStyle/>
+          <a:p>
+            <a:endParaRPr lang="en-US"/>
+          </a:p>
+        </p:txBody>
       </p:sp>
       <p:sp>
         <p:nvSpPr>
@@ -13417,7 +13681,7 @@
           <a:bodyPr wrap="square" lIns="0" tIns="0" rIns="0" bIns="0" rtlCol="0" anchor="ctr"/>
           <a:lstStyle/>
           <a:p>
-            <a:pPr indent="0" marL="0">
+            <a:pPr marL="0" indent="0">
               <a:buNone/>
             </a:pPr>
             <a:r>
@@ -13459,6 +13723,13 @@
             <a:prstDash val="solid"/>
           </a:ln>
         </p:spPr>
+        <p:txBody>
+          <a:bodyPr/>
+          <a:lstStyle/>
+          <a:p>
+            <a:endParaRPr lang="en-US"/>
+          </a:p>
+        </p:txBody>
       </p:sp>
       <p:sp>
         <p:nvSpPr>
@@ -13481,7 +13752,7 @@
           <a:bodyPr wrap="square" lIns="0" tIns="0" rIns="0" bIns="0" rtlCol="0" anchor="ctr"/>
           <a:lstStyle/>
           <a:p>
-            <a:pPr indent="0" marL="0">
+            <a:pPr marL="0" indent="0">
               <a:buNone/>
             </a:pPr>
             <a:r>
@@ -13523,6 +13794,13 @@
             <a:prstDash val="solid"/>
           </a:ln>
         </p:spPr>
+        <p:txBody>
+          <a:bodyPr/>
+          <a:lstStyle/>
+          <a:p>
+            <a:endParaRPr lang="en-US"/>
+          </a:p>
+        </p:txBody>
       </p:sp>
       <p:sp>
         <p:nvSpPr>
@@ -13545,7 +13823,7 @@
           <a:bodyPr wrap="square" lIns="0" tIns="0" rIns="0" bIns="0" rtlCol="0" anchor="ctr"/>
           <a:lstStyle/>
           <a:p>
-            <a:pPr indent="0" marL="0">
+            <a:pPr marL="0" indent="0">
               <a:buNone/>
             </a:pPr>
             <a:r>
@@ -13587,6 +13865,13 @@
             <a:prstDash val="solid"/>
           </a:ln>
         </p:spPr>
+        <p:txBody>
+          <a:bodyPr/>
+          <a:lstStyle/>
+          <a:p>
+            <a:endParaRPr lang="en-US"/>
+          </a:p>
+        </p:txBody>
       </p:sp>
       <p:sp>
         <p:nvSpPr>
@@ -13609,7 +13894,7 @@
           <a:bodyPr wrap="square" lIns="0" tIns="0" rIns="0" bIns="0" rtlCol="0" anchor="ctr"/>
           <a:lstStyle/>
           <a:p>
-            <a:pPr indent="0" marL="0">
+            <a:pPr marL="0" indent="0">
               <a:buNone/>
             </a:pPr>
             <a:r>
@@ -13651,6 +13936,13 @@
             <a:prstDash val="solid"/>
           </a:ln>
         </p:spPr>
+        <p:txBody>
+          <a:bodyPr/>
+          <a:lstStyle/>
+          <a:p>
+            <a:endParaRPr lang="en-US"/>
+          </a:p>
+        </p:txBody>
       </p:sp>
       <p:sp>
         <p:nvSpPr>
@@ -13673,7 +13965,7 @@
           <a:bodyPr wrap="square" lIns="0" tIns="0" rIns="0" bIns="0" rtlCol="0" anchor="ctr"/>
           <a:lstStyle/>
           <a:p>
-            <a:pPr indent="0" marL="0">
+            <a:pPr marL="0" indent="0">
               <a:buNone/>
             </a:pPr>
             <a:r>
@@ -13715,6 +14007,13 @@
             <a:prstDash val="solid"/>
           </a:ln>
         </p:spPr>
+        <p:txBody>
+          <a:bodyPr/>
+          <a:lstStyle/>
+          <a:p>
+            <a:endParaRPr lang="en-US"/>
+          </a:p>
+        </p:txBody>
       </p:sp>
       <p:sp>
         <p:nvSpPr>
@@ -13737,7 +14036,7 @@
           <a:bodyPr wrap="square" lIns="0" tIns="0" rIns="0" bIns="0" rtlCol="0" anchor="ctr"/>
           <a:lstStyle/>
           <a:p>
-            <a:pPr indent="0" marL="0">
+            <a:pPr marL="0" indent="0">
               <a:buNone/>
             </a:pPr>
             <a:r>
@@ -13779,6 +14078,13 @@
             <a:prstDash val="solid"/>
           </a:ln>
         </p:spPr>
+        <p:txBody>
+          <a:bodyPr/>
+          <a:lstStyle/>
+          <a:p>
+            <a:endParaRPr lang="en-US"/>
+          </a:p>
+        </p:txBody>
       </p:sp>
       <p:sp>
         <p:nvSpPr>
@@ -13801,7 +14107,7 @@
           <a:bodyPr wrap="square" lIns="0" tIns="0" rIns="0" bIns="0" rtlCol="0" anchor="ctr"/>
           <a:lstStyle/>
           <a:p>
-            <a:pPr indent="0" marL="0">
+            <a:pPr marL="0" indent="0">
               <a:buNone/>
             </a:pPr>
             <a:r>
@@ -13840,11 +14146,8 @@
           <a:bodyPr wrap="square" lIns="0" tIns="0" rIns="0" bIns="0" rtlCol="0" anchor="ctr"/>
           <a:lstStyle/>
           <a:p>
-            <a:pPr indent="0" marL="0">
-              <a:buNone/>
-            </a:pPr>
-            <a:r>
-              <a:rPr lang="en-US" sz="800" i="1" dirty="0">
+            <a:r>
+              <a:rPr lang="en-US" sz="1000" i="1" dirty="0">
                 <a:solidFill>
                   <a:srgbClr val="028090"/>
                 </a:solidFill>
@@ -13852,9 +14155,9 @@
                 <a:ea typeface="Calibri" pitchFamily="34" charset="-122"/>
                 <a:cs typeface="Calibri" pitchFamily="34" charset="-120"/>
               </a:rPr>
-              <a:t>We'd like your input on how to name your workspaces.</a:t>
-            </a:r>
-            <a:endParaRPr lang="en-US" sz="800" dirty="0"/>
+              <a:t>We'd like your input on naming your workspaces.</a:t>
+            </a:r>
+            <a:endParaRPr lang="en-US" sz="1000" dirty="0"/>
           </a:p>
         </p:txBody>
       </p:sp>
@@ -13879,7 +14182,7 @@
           <a:bodyPr wrap="square" lIns="0" tIns="0" rIns="0" bIns="0" rtlCol="0" anchor="ctr"/>
           <a:lstStyle/>
           <a:p>
-            <a:pPr algn="r" indent="0" marL="0">
+            <a:pPr marL="0" indent="0" algn="r">
               <a:buNone/>
             </a:pPr>
             <a:r>
@@ -13913,6 +14216,7 @@
         <a:solidFill>
           <a:srgbClr val="F7F8FA"/>
         </a:solidFill>
+        <a:effectLst/>
       </p:bgPr>
     </p:bg>
     <p:spTree>
@@ -13950,7 +14254,7 @@
           <a:bodyPr wrap="square" lIns="0" tIns="0" rIns="0" bIns="0" rtlCol="0" anchor="ctr"/>
           <a:lstStyle/>
           <a:p>
-            <a:pPr indent="0" marL="0">
+            <a:pPr marL="0" indent="0">
               <a:buNone/>
             </a:pPr>
             <a:r>
@@ -13989,7 +14293,7 @@
           <a:bodyPr wrap="square" lIns="0" tIns="0" rIns="0" bIns="0" rtlCol="0" anchor="ctr"/>
           <a:lstStyle/>
           <a:p>
-            <a:pPr indent="0" marL="0">
+            <a:pPr marL="0" indent="0">
               <a:buNone/>
             </a:pPr>
             <a:r>
@@ -14015,7 +14319,7 @@
         </p:nvSpPr>
         <p:spPr>
           <a:xfrm>
-            <a:off x="548640" y="1463040"/>
+            <a:off x="548640" y="1577340"/>
             <a:ext cx="2286000" cy="228600"/>
           </a:xfrm>
           <a:prstGeom prst="rect">
@@ -14028,7 +14332,7 @@
           <a:bodyPr wrap="square" lIns="0" tIns="0" rIns="0" bIns="0" rtlCol="0" anchor="ctr"/>
           <a:lstStyle/>
           <a:p>
-            <a:pPr indent="0" marL="0">
+            <a:pPr marL="0" indent="0">
               <a:buNone/>
             </a:pPr>
             <a:r>
@@ -14067,7 +14371,7 @@
           <a:bodyPr wrap="square" lIns="0" tIns="0" rIns="0" bIns="0" rtlCol="0" anchor="ctr"/>
           <a:lstStyle/>
           <a:p>
-            <a:pPr indent="0" marL="0">
+            <a:pPr marL="0" indent="0">
               <a:buNone/>
             </a:pPr>
             <a:r>
@@ -14084,7 +14388,7 @@
             <a:endParaRPr lang="en-US" sz="1000" dirty="0"/>
           </a:p>
           <a:p>
-            <a:pPr indent="0" marL="0">
+            <a:pPr marL="0" indent="0">
               <a:buNone/>
             </a:pPr>
             <a:r>
@@ -14110,7 +14414,7 @@
         </p:nvSpPr>
         <p:spPr>
           <a:xfrm>
-            <a:off x="548640" y="2240280"/>
+            <a:off x="548640" y="2379617"/>
             <a:ext cx="2286000" cy="228600"/>
           </a:xfrm>
           <a:prstGeom prst="rect">
@@ -14123,7 +14427,7 @@
           <a:bodyPr wrap="square" lIns="0" tIns="0" rIns="0" bIns="0" rtlCol="0" anchor="ctr"/>
           <a:lstStyle/>
           <a:p>
-            <a:pPr indent="0" marL="0">
+            <a:pPr marL="0" indent="0">
               <a:buNone/>
             </a:pPr>
             <a:r>
@@ -14162,7 +14466,7 @@
           <a:bodyPr wrap="square" lIns="0" tIns="0" rIns="0" bIns="0" rtlCol="0" anchor="ctr"/>
           <a:lstStyle/>
           <a:p>
-            <a:pPr indent="0" marL="0">
+            <a:pPr marL="0" indent="0">
               <a:buNone/>
             </a:pPr>
             <a:r>
@@ -14179,7 +14483,7 @@
             <a:endParaRPr lang="en-US" sz="1000" dirty="0"/>
           </a:p>
           <a:p>
-            <a:pPr indent="0" marL="0">
+            <a:pPr marL="0" indent="0">
               <a:buNone/>
             </a:pPr>
             <a:r>
@@ -14205,7 +14509,7 @@
         </p:nvSpPr>
         <p:spPr>
           <a:xfrm>
-            <a:off x="548640" y="3017520"/>
+            <a:off x="548640" y="3177540"/>
             <a:ext cx="2286000" cy="228600"/>
           </a:xfrm>
           <a:prstGeom prst="rect">
@@ -14218,7 +14522,7 @@
           <a:bodyPr wrap="square" lIns="0" tIns="0" rIns="0" bIns="0" rtlCol="0" anchor="ctr"/>
           <a:lstStyle/>
           <a:p>
-            <a:pPr indent="0" marL="0">
+            <a:pPr marL="0" indent="0">
               <a:buNone/>
             </a:pPr>
             <a:r>
@@ -14257,7 +14561,7 @@
           <a:bodyPr wrap="square" lIns="0" tIns="0" rIns="0" bIns="0" rtlCol="0" anchor="ctr"/>
           <a:lstStyle/>
           <a:p>
-            <a:pPr indent="0" marL="0">
+            <a:pPr marL="0" indent="0">
               <a:buNone/>
             </a:pPr>
             <a:r>
@@ -14283,7 +14587,7 @@
         </p:nvSpPr>
         <p:spPr>
           <a:xfrm>
-            <a:off x="548640" y="3794760"/>
+            <a:off x="548640" y="3955869"/>
             <a:ext cx="2286000" cy="228600"/>
           </a:xfrm>
           <a:prstGeom prst="rect">
@@ -14296,7 +14600,7 @@
           <a:bodyPr wrap="square" lIns="0" tIns="0" rIns="0" bIns="0" rtlCol="0" anchor="ctr"/>
           <a:lstStyle/>
           <a:p>
-            <a:pPr indent="0" marL="0">
+            <a:pPr marL="0" indent="0">
               <a:buNone/>
             </a:pPr>
             <a:r>
@@ -14335,7 +14639,7 @@
           <a:bodyPr wrap="square" lIns="0" tIns="0" rIns="0" bIns="0" rtlCol="0" anchor="ctr"/>
           <a:lstStyle/>
           <a:p>
-            <a:pPr indent="0" marL="0">
+            <a:pPr marL="0" indent="0">
               <a:buNone/>
             </a:pPr>
             <a:r>
@@ -14374,11 +14678,11 @@
           <a:bodyPr wrap="square" lIns="0" tIns="0" rIns="0" bIns="0" rtlCol="0" anchor="ctr"/>
           <a:lstStyle/>
           <a:p>
-            <a:pPr indent="0" marL="0">
-              <a:buNone/>
-            </a:pPr>
-            <a:r>
-              <a:rPr lang="en-US" sz="800" i="1" dirty="0">
+            <a:pPr marL="0" indent="0">
+              <a:buNone/>
+            </a:pPr>
+            <a:r>
+              <a:rPr lang="en-US" sz="1000" i="1" dirty="0">
                 <a:solidFill>
                   <a:srgbClr val="028090"/>
                 </a:solidFill>
@@ -14388,7 +14692,7 @@
               </a:rPr>
               <a:t>We'll walk through an assessment live — 24 questions, two actionable quadrants.</a:t>
             </a:r>
-            <a:endParaRPr lang="en-US" sz="800" dirty="0"/>
+            <a:endParaRPr lang="en-US" sz="1000" dirty="0"/>
           </a:p>
         </p:txBody>
       </p:sp>
@@ -14413,7 +14717,7 @@
           <a:bodyPr wrap="square" lIns="0" tIns="0" rIns="0" bIns="0" rtlCol="0" anchor="ctr"/>
           <a:lstStyle/>
           <a:p>
-            <a:pPr algn="r" indent="0" marL="0">
+            <a:pPr marL="0" indent="0" algn="r">
               <a:buNone/>
             </a:pPr>
             <a:r>
@@ -14447,6 +14751,7 @@
         <a:solidFill>
           <a:srgbClr val="F7F8FA"/>
         </a:solidFill>
+        <a:effectLst/>
       </p:bgPr>
     </p:bg>
     <p:spTree>
@@ -14484,7 +14789,7 @@
           <a:bodyPr wrap="square" lIns="0" tIns="0" rIns="0" bIns="0" rtlCol="0" anchor="ctr"/>
           <a:lstStyle/>
           <a:p>
-            <a:pPr indent="0" marL="0">
+            <a:pPr marL="0" indent="0">
               <a:buNone/>
             </a:pPr>
             <a:r>
@@ -14523,7 +14828,7 @@
           <a:bodyPr wrap="square" lIns="0" tIns="0" rIns="0" bIns="0" rtlCol="0" anchor="ctr"/>
           <a:lstStyle/>
           <a:p>
-            <a:pPr indent="0" marL="0">
+            <a:pPr marL="0" indent="0">
               <a:buNone/>
             </a:pPr>
             <a:r>
@@ -14549,7 +14854,7 @@
         </p:nvSpPr>
         <p:spPr>
           <a:xfrm>
-            <a:off x="548640" y="1371600"/>
+            <a:off x="548640" y="1554480"/>
             <a:ext cx="2286000" cy="228600"/>
           </a:xfrm>
           <a:prstGeom prst="rect">
@@ -14562,7 +14867,7 @@
           <a:bodyPr wrap="square" lIns="0" tIns="0" rIns="0" bIns="0" rtlCol="0" anchor="ctr"/>
           <a:lstStyle/>
           <a:p>
-            <a:pPr indent="0" marL="0">
+            <a:pPr marL="0" indent="0">
               <a:buNone/>
             </a:pPr>
             <a:r>
@@ -14601,7 +14906,7 @@
           <a:bodyPr wrap="square" lIns="0" tIns="0" rIns="0" bIns="0" rtlCol="0" anchor="ctr"/>
           <a:lstStyle/>
           <a:p>
-            <a:pPr indent="0" marL="0">
+            <a:pPr marL="0" indent="0">
               <a:buNone/>
             </a:pPr>
             <a:r>
@@ -14618,7 +14923,7 @@
             <a:endParaRPr lang="en-US" sz="1000" dirty="0"/>
           </a:p>
           <a:p>
-            <a:pPr indent="0" marL="0">
+            <a:pPr marL="0" indent="0">
               <a:buNone/>
             </a:pPr>
             <a:r>
@@ -14644,7 +14949,7 @@
         </p:nvSpPr>
         <p:spPr>
           <a:xfrm>
-            <a:off x="548640" y="2194560"/>
+            <a:off x="548640" y="2400300"/>
             <a:ext cx="2286000" cy="228600"/>
           </a:xfrm>
           <a:prstGeom prst="rect">
@@ -14657,7 +14962,7 @@
           <a:bodyPr wrap="square" lIns="0" tIns="0" rIns="0" bIns="0" rtlCol="0" anchor="ctr"/>
           <a:lstStyle/>
           <a:p>
-            <a:pPr indent="0" marL="0">
+            <a:pPr marL="0" indent="0">
               <a:buNone/>
             </a:pPr>
             <a:r>
@@ -14696,7 +15001,7 @@
           <a:bodyPr wrap="square" lIns="0" tIns="0" rIns="0" bIns="0" rtlCol="0" anchor="ctr"/>
           <a:lstStyle/>
           <a:p>
-            <a:pPr indent="0" marL="0">
+            <a:pPr marL="0" indent="0">
               <a:buNone/>
             </a:pPr>
             <a:r>
@@ -14713,7 +15018,7 @@
             <a:endParaRPr lang="en-US" sz="1000" dirty="0"/>
           </a:p>
           <a:p>
-            <a:pPr indent="0" marL="0">
+            <a:pPr marL="0" indent="0">
               <a:buNone/>
             </a:pPr>
             <a:r>
@@ -14739,7 +15044,7 @@
         </p:nvSpPr>
         <p:spPr>
           <a:xfrm>
-            <a:off x="548640" y="3017520"/>
+            <a:off x="557348" y="3261359"/>
             <a:ext cx="2286000" cy="228600"/>
           </a:xfrm>
           <a:prstGeom prst="rect">
@@ -14752,7 +15057,7 @@
           <a:bodyPr wrap="square" lIns="0" tIns="0" rIns="0" bIns="0" rtlCol="0" anchor="ctr"/>
           <a:lstStyle/>
           <a:p>
-            <a:pPr indent="0" marL="0">
+            <a:pPr marL="0" indent="0">
               <a:buNone/>
             </a:pPr>
             <a:r>
@@ -14791,7 +15096,7 @@
           <a:bodyPr wrap="square" lIns="0" tIns="0" rIns="0" bIns="0" rtlCol="0" anchor="ctr"/>
           <a:lstStyle/>
           <a:p>
-            <a:pPr indent="0" marL="0">
+            <a:pPr marL="0" indent="0">
               <a:buNone/>
             </a:pPr>
             <a:r>
@@ -14808,7 +15113,7 @@
             <a:endParaRPr lang="en-US" sz="1000" dirty="0"/>
           </a:p>
           <a:p>
-            <a:pPr indent="0" marL="0">
+            <a:pPr marL="0" indent="0">
               <a:buNone/>
             </a:pPr>
             <a:r>
@@ -14834,7 +15139,7 @@
         </p:nvSpPr>
         <p:spPr>
           <a:xfrm>
-            <a:off x="548640" y="3840480"/>
+            <a:off x="557348" y="4046220"/>
             <a:ext cx="2286000" cy="228600"/>
           </a:xfrm>
           <a:prstGeom prst="rect">
@@ -14847,7 +15152,7 @@
           <a:bodyPr wrap="square" lIns="0" tIns="0" rIns="0" bIns="0" rtlCol="0" anchor="ctr"/>
           <a:lstStyle/>
           <a:p>
-            <a:pPr indent="0" marL="0">
+            <a:pPr marL="0" indent="0">
               <a:buNone/>
             </a:pPr>
             <a:r>
@@ -14886,7 +15191,7 @@
           <a:bodyPr wrap="square" lIns="0" tIns="0" rIns="0" bIns="0" rtlCol="0" anchor="ctr"/>
           <a:lstStyle/>
           <a:p>
-            <a:pPr indent="0" marL="0">
+            <a:pPr marL="0" indent="0">
               <a:buNone/>
             </a:pPr>
             <a:r>
@@ -14903,7 +15208,7 @@
             <a:endParaRPr lang="en-US" sz="1000" dirty="0"/>
           </a:p>
           <a:p>
-            <a:pPr indent="0" marL="0">
+            <a:pPr marL="0" indent="0">
               <a:buNone/>
             </a:pPr>
             <a:r>
@@ -14929,7 +15234,7 @@
         </p:nvSpPr>
         <p:spPr>
           <a:xfrm>
-            <a:off x="548640" y="4800600"/>
+            <a:off x="548640" y="4693918"/>
             <a:ext cx="7315200" cy="274320"/>
           </a:xfrm>
           <a:prstGeom prst="rect">
@@ -14942,11 +15247,8 @@
           <a:bodyPr wrap="square" lIns="0" tIns="0" rIns="0" bIns="0" rtlCol="0" anchor="ctr"/>
           <a:lstStyle/>
           <a:p>
-            <a:pPr indent="0" marL="0">
-              <a:buNone/>
-            </a:pPr>
-            <a:r>
-              <a:rPr lang="en-US" sz="800" i="1" dirty="0">
+            <a:r>
+              <a:rPr lang="en-US" sz="1000" i="1" dirty="0">
                 <a:solidFill>
                   <a:srgbClr val="028090"/>
                 </a:solidFill>
@@ -14954,9 +15256,9 @@
                 <a:ea typeface="Calibri" pitchFamily="34" charset="-122"/>
                 <a:cs typeface="Calibri" pitchFamily="34" charset="-120"/>
               </a:rPr>
-              <a:t>We'll show you your portfolio plotted on both quadrants with run rate and tech debt attached.</a:t>
-            </a:r>
-            <a:endParaRPr lang="en-US" sz="800" dirty="0"/>
+              <a:t>We'll show you your portfolio plotted in both quadrants, with run rate and tech debt included.</a:t>
+            </a:r>
+            <a:endParaRPr lang="en-US" sz="1000" dirty="0"/>
           </a:p>
         </p:txBody>
       </p:sp>
@@ -14981,7 +15283,7 @@
           <a:bodyPr wrap="square" lIns="0" tIns="0" rIns="0" bIns="0" rtlCol="0" anchor="ctr"/>
           <a:lstStyle/>
           <a:p>
-            <a:pPr algn="r" indent="0" marL="0">
+            <a:pPr marL="0" indent="0" algn="r">
               <a:buNone/>
             </a:pPr>
             <a:r>
@@ -15300,4 +15602,319 @@
     </a:ext>
   </a:extLst>
 </a:theme>
+</file>
+
+<file path=ppt/theme/theme2.xml><?xml version="1.0" encoding="utf-8"?>
+<a:theme xmlns:a="http://schemas.openxmlformats.org/drawingml/2006/main" name="Office Theme">
+  <a:themeElements>
+    <a:clrScheme name="Office">
+      <a:dk1>
+        <a:sysClr val="windowText" lastClr="000000"/>
+      </a:dk1>
+      <a:lt1>
+        <a:sysClr val="window" lastClr="FFFFFF"/>
+      </a:lt1>
+      <a:dk2>
+        <a:srgbClr val="0E2841"/>
+      </a:dk2>
+      <a:lt2>
+        <a:srgbClr val="E8E8E8"/>
+      </a:lt2>
+      <a:accent1>
+        <a:srgbClr val="156082"/>
+      </a:accent1>
+      <a:accent2>
+        <a:srgbClr val="E97132"/>
+      </a:accent2>
+      <a:accent3>
+        <a:srgbClr val="196B24"/>
+      </a:accent3>
+      <a:accent4>
+        <a:srgbClr val="0F9ED5"/>
+      </a:accent4>
+      <a:accent5>
+        <a:srgbClr val="A02B93"/>
+      </a:accent5>
+      <a:accent6>
+        <a:srgbClr val="4EA72E"/>
+      </a:accent6>
+      <a:hlink>
+        <a:srgbClr val="467886"/>
+      </a:hlink>
+      <a:folHlink>
+        <a:srgbClr val="96607D"/>
+      </a:folHlink>
+    </a:clrScheme>
+    <a:fontScheme name="Office">
+      <a:majorFont>
+        <a:latin typeface="Aptos Display" panose="02110004020202020204"/>
+        <a:ea typeface=""/>
+        <a:cs typeface=""/>
+        <a:font script="Jpan" typeface="游ゴシック Light"/>
+        <a:font script="Hang" typeface="맑은 고딕"/>
+        <a:font script="Hans" typeface="等线 Light"/>
+        <a:font script="Hant" typeface="新細明體"/>
+        <a:font script="Arab" typeface="Times New Roman"/>
+        <a:font script="Hebr" typeface="Times New Roman"/>
+        <a:font script="Thai" typeface="Angsana New"/>
+        <a:font script="Ethi" typeface="Nyala"/>
+        <a:font script="Beng" typeface="Vrinda"/>
+        <a:font script="Gujr" typeface="Shruti"/>
+        <a:font script="Khmr" typeface="MoolBoran"/>
+        <a:font script="Knda" typeface="Tunga"/>
+        <a:font script="Guru" typeface="Raavi"/>
+        <a:font script="Cans" typeface="Euphemia"/>
+        <a:font script="Cher" typeface="Plantagenet Cherokee"/>
+        <a:font script="Yiii" typeface="Microsoft Yi Baiti"/>
+        <a:font script="Tibt" typeface="Microsoft Himalaya"/>
+        <a:font script="Thaa" typeface="MV Boli"/>
+        <a:font script="Deva" typeface="Mangal"/>
+        <a:font script="Telu" typeface="Gautami"/>
+        <a:font script="Taml" typeface="Latha"/>
+        <a:font script="Syrc" typeface="Estrangelo Edessa"/>
+        <a:font script="Orya" typeface="Kalinga"/>
+        <a:font script="Mlym" typeface="Kartika"/>
+        <a:font script="Laoo" typeface="DokChampa"/>
+        <a:font script="Sinh" typeface="Iskoola Pota"/>
+        <a:font script="Mong" typeface="Mongolian Baiti"/>
+        <a:font script="Viet" typeface="Times New Roman"/>
+        <a:font script="Uigh" typeface="Microsoft Uighur"/>
+        <a:font script="Geor" typeface="Sylfaen"/>
+        <a:font script="Armn" typeface="Arial"/>
+        <a:font script="Bugi" typeface="Leelawadee UI"/>
+        <a:font script="Bopo" typeface="Microsoft JhengHei"/>
+        <a:font script="Java" typeface="Javanese Text"/>
+        <a:font script="Lisu" typeface="Segoe UI"/>
+        <a:font script="Mymr" typeface="Myanmar Text"/>
+        <a:font script="Nkoo" typeface="Ebrima"/>
+        <a:font script="Olck" typeface="Nirmala UI"/>
+        <a:font script="Osma" typeface="Ebrima"/>
+        <a:font script="Phag" typeface="Phagspa"/>
+        <a:font script="Syrn" typeface="Estrangelo Edessa"/>
+        <a:font script="Syrj" typeface="Estrangelo Edessa"/>
+        <a:font script="Syre" typeface="Estrangelo Edessa"/>
+        <a:font script="Sora" typeface="Nirmala UI"/>
+        <a:font script="Tale" typeface="Microsoft Tai Le"/>
+        <a:font script="Talu" typeface="Microsoft New Tai Lue"/>
+        <a:font script="Tfng" typeface="Ebrima"/>
+      </a:majorFont>
+      <a:minorFont>
+        <a:latin typeface="Aptos" panose="02110004020202020204"/>
+        <a:ea typeface=""/>
+        <a:cs typeface=""/>
+        <a:font script="Jpan" typeface="游ゴシック"/>
+        <a:font script="Hang" typeface="맑은 고딕"/>
+        <a:font script="Hans" typeface="等线"/>
+        <a:font script="Hant" typeface="新細明體"/>
+        <a:font script="Arab" typeface="Arial"/>
+        <a:font script="Hebr" typeface="Arial"/>
+        <a:font script="Thai" typeface="Cordia New"/>
+        <a:font script="Ethi" typeface="Nyala"/>
+        <a:font script="Beng" typeface="Vrinda"/>
+        <a:font script="Gujr" typeface="Shruti"/>
+        <a:font script="Khmr" typeface="DaunPenh"/>
+        <a:font script="Knda" typeface="Tunga"/>
+        <a:font script="Guru" typeface="Raavi"/>
+        <a:font script="Cans" typeface="Euphemia"/>
+        <a:font script="Cher" typeface="Plantagenet Cherokee"/>
+        <a:font script="Yiii" typeface="Microsoft Yi Baiti"/>
+        <a:font script="Tibt" typeface="Microsoft Himalaya"/>
+        <a:font script="Thaa" typeface="MV Boli"/>
+        <a:font script="Deva" typeface="Mangal"/>
+        <a:font script="Telu" typeface="Gautami"/>
+        <a:font script="Taml" typeface="Latha"/>
+        <a:font script="Syrc" typeface="Estrangelo Edessa"/>
+        <a:font script="Orya" typeface="Kalinga"/>
+        <a:font script="Mlym" typeface="Kartika"/>
+        <a:font script="Laoo" typeface="DokChampa"/>
+        <a:font script="Sinh" typeface="Iskoola Pota"/>
+        <a:font script="Mong" typeface="Mongolian Baiti"/>
+        <a:font script="Viet" typeface="Arial"/>
+        <a:font script="Uigh" typeface="Microsoft Uighur"/>
+        <a:font script="Geor" typeface="Sylfaen"/>
+        <a:font script="Armn" typeface="Arial"/>
+        <a:font script="Bugi" typeface="Leelawadee UI"/>
+        <a:font script="Bopo" typeface="Microsoft JhengHei"/>
+        <a:font script="Java" typeface="Javanese Text"/>
+        <a:font script="Lisu" typeface="Segoe UI"/>
+        <a:font script="Mymr" typeface="Myanmar Text"/>
+        <a:font script="Nkoo" typeface="Ebrima"/>
+        <a:font script="Olck" typeface="Nirmala UI"/>
+        <a:font script="Osma" typeface="Ebrima"/>
+        <a:font script="Phag" typeface="Phagspa"/>
+        <a:font script="Syrn" typeface="Estrangelo Edessa"/>
+        <a:font script="Syrj" typeface="Estrangelo Edessa"/>
+        <a:font script="Syre" typeface="Estrangelo Edessa"/>
+        <a:font script="Sora" typeface="Nirmala UI"/>
+        <a:font script="Tale" typeface="Microsoft Tai Le"/>
+        <a:font script="Talu" typeface="Microsoft New Tai Lue"/>
+        <a:font script="Tfng" typeface="Ebrima"/>
+      </a:minorFont>
+    </a:fontScheme>
+    <a:fmtScheme name="Office">
+      <a:fillStyleLst>
+        <a:solidFill>
+          <a:schemeClr val="phClr"/>
+        </a:solidFill>
+        <a:gradFill rotWithShape="1">
+          <a:gsLst>
+            <a:gs pos="0">
+              <a:schemeClr val="phClr">
+                <a:lumMod val="110000"/>
+                <a:satMod val="105000"/>
+                <a:tint val="67000"/>
+              </a:schemeClr>
+            </a:gs>
+            <a:gs pos="50000">
+              <a:schemeClr val="phClr">
+                <a:lumMod val="105000"/>
+                <a:satMod val="103000"/>
+                <a:tint val="73000"/>
+              </a:schemeClr>
+            </a:gs>
+            <a:gs pos="100000">
+              <a:schemeClr val="phClr">
+                <a:lumMod val="105000"/>
+                <a:satMod val="109000"/>
+                <a:tint val="81000"/>
+              </a:schemeClr>
+            </a:gs>
+          </a:gsLst>
+          <a:lin ang="5400000" scaled="0"/>
+        </a:gradFill>
+        <a:gradFill rotWithShape="1">
+          <a:gsLst>
+            <a:gs pos="0">
+              <a:schemeClr val="phClr">
+                <a:satMod val="103000"/>
+                <a:lumMod val="102000"/>
+                <a:tint val="94000"/>
+              </a:schemeClr>
+            </a:gs>
+            <a:gs pos="50000">
+              <a:schemeClr val="phClr">
+                <a:satMod val="110000"/>
+                <a:lumMod val="100000"/>
+                <a:shade val="100000"/>
+              </a:schemeClr>
+            </a:gs>
+            <a:gs pos="100000">
+              <a:schemeClr val="phClr">
+                <a:lumMod val="99000"/>
+                <a:satMod val="120000"/>
+                <a:shade val="78000"/>
+              </a:schemeClr>
+            </a:gs>
+          </a:gsLst>
+          <a:lin ang="5400000" scaled="0"/>
+        </a:gradFill>
+      </a:fillStyleLst>
+      <a:lnStyleLst>
+        <a:ln w="12700" cap="flat" cmpd="sng" algn="ctr">
+          <a:solidFill>
+            <a:schemeClr val="phClr"/>
+          </a:solidFill>
+          <a:prstDash val="solid"/>
+          <a:miter lim="800000"/>
+        </a:ln>
+        <a:ln w="19050" cap="flat" cmpd="sng" algn="ctr">
+          <a:solidFill>
+            <a:schemeClr val="phClr"/>
+          </a:solidFill>
+          <a:prstDash val="solid"/>
+          <a:miter lim="800000"/>
+        </a:ln>
+        <a:ln w="25400" cap="flat" cmpd="sng" algn="ctr">
+          <a:solidFill>
+            <a:schemeClr val="phClr"/>
+          </a:solidFill>
+          <a:prstDash val="solid"/>
+          <a:miter lim="800000"/>
+        </a:ln>
+      </a:lnStyleLst>
+      <a:effectStyleLst>
+        <a:effectStyle>
+          <a:effectLst/>
+        </a:effectStyle>
+        <a:effectStyle>
+          <a:effectLst/>
+        </a:effectStyle>
+        <a:effectStyle>
+          <a:effectLst>
+            <a:outerShdw blurRad="57150" dist="19050" dir="5400000" algn="ctr" rotWithShape="0">
+              <a:srgbClr val="000000">
+                <a:alpha val="63000"/>
+              </a:srgbClr>
+            </a:outerShdw>
+          </a:effectLst>
+        </a:effectStyle>
+      </a:effectStyleLst>
+      <a:bgFillStyleLst>
+        <a:solidFill>
+          <a:schemeClr val="phClr"/>
+        </a:solidFill>
+        <a:solidFill>
+          <a:schemeClr val="phClr">
+            <a:tint val="95000"/>
+            <a:satMod val="170000"/>
+          </a:schemeClr>
+        </a:solidFill>
+        <a:gradFill rotWithShape="1">
+          <a:gsLst>
+            <a:gs pos="0">
+              <a:schemeClr val="phClr">
+                <a:tint val="93000"/>
+                <a:satMod val="150000"/>
+                <a:shade val="98000"/>
+                <a:lumMod val="102000"/>
+              </a:schemeClr>
+            </a:gs>
+            <a:gs pos="50000">
+              <a:schemeClr val="phClr">
+                <a:tint val="98000"/>
+                <a:satMod val="130000"/>
+                <a:shade val="90000"/>
+                <a:lumMod val="103000"/>
+              </a:schemeClr>
+            </a:gs>
+            <a:gs pos="100000">
+              <a:schemeClr val="phClr">
+                <a:shade val="63000"/>
+                <a:satMod val="120000"/>
+              </a:schemeClr>
+            </a:gs>
+          </a:gsLst>
+          <a:lin ang="5400000" scaled="0"/>
+        </a:gradFill>
+      </a:bgFillStyleLst>
+    </a:fmtScheme>
+  </a:themeElements>
+  <a:objectDefaults>
+    <a:lnDef>
+      <a:spPr/>
+      <a:bodyPr/>
+      <a:lstStyle/>
+      <a:style>
+        <a:lnRef idx="2">
+          <a:schemeClr val="accent1"/>
+        </a:lnRef>
+        <a:fillRef idx="0">
+          <a:schemeClr val="accent1"/>
+        </a:fillRef>
+        <a:effectRef idx="1">
+          <a:schemeClr val="accent1"/>
+        </a:effectRef>
+        <a:fontRef idx="minor">
+          <a:schemeClr val="tx1"/>
+        </a:fontRef>
+      </a:style>
+    </a:lnDef>
+  </a:objectDefaults>
+  <a:extraClrSchemeLst/>
+  <a:extLst>
+    <a:ext uri="{05A4C25C-085E-4340-85A3-A5531E510DB2}">
+      <thm15:themeFamily xmlns:thm15="http://schemas.microsoft.com/office/thememl/2012/main" name="Office Theme" id="{2E142A2C-CD16-42D6-873A-C26D2A0506FA}" vid="{1BDDFF52-6CD6-40A5-AB3C-68EB2F1E4D0A}"/>
+    </a:ext>
+  </a:extLst>
+</a:theme>
 </file>
--- a/marketing/GetInSync_NextGen_Garland_Light.pptx
+++ b/marketing/GetInSync_NextGen_Garland_Light.pptx
@@ -8097,7 +8097,7 @@
         </p:nvSpPr>
         <p:spPr>
           <a:xfrm>
-            <a:off x="548640" y="4800600"/>
+            <a:off x="548640" y="4668675"/>
             <a:ext cx="7315200" cy="274320"/>
           </a:xfrm>
           <a:prstGeom prst="rect">
@@ -11378,7 +11378,7 @@
                 <a:ea typeface="Calibri" pitchFamily="34" charset="-122"/>
                 <a:cs typeface="Calibri" pitchFamily="34" charset="-120"/>
               </a:rPr>
-              <a:t>We'll walk through your actual cost data in the live demo.</a:t>
+              <a:t>We'll walk through your actual cost data in the onsite workshop.</a:t>
             </a:r>
             <a:endParaRPr lang="en-US" sz="1000" dirty="0"/>
           </a:p>
@@ -12654,7 +12654,7 @@
                 <a:ea typeface="Calibri" pitchFamily="34" charset="-122"/>
                 <a:cs typeface="Calibri" pitchFamily="34" charset="-120"/>
               </a:rPr>
-              <a:t>We'll walk through your actual cost data in the live demo.</a:t>
+              <a:t>We'll walk through your actual cost data in the onsite workshop.</a:t>
             </a:r>
             <a:endParaRPr lang="en-US" sz="1000" dirty="0"/>
           </a:p>
@@ -14509,7 +14509,7 @@
         </p:nvSpPr>
         <p:spPr>
           <a:xfrm>
-            <a:off x="548640" y="3177540"/>
+            <a:off x="548640" y="3188970"/>
             <a:ext cx="2286000" cy="228600"/>
           </a:xfrm>
           <a:prstGeom prst="rect">
